--- a/2026-Q4/09-TheAlterToday/Week09-TheAltarToday.pptx
+++ b/2026-Q4/09-TheAlterToday/Week09-TheAltarToday.pptx
@@ -4,6 +4,9 @@
   <p:sldMasterIdLst>
     <p:sldMasterId id="2147483648" r:id="rId1"/>
   </p:sldMasterIdLst>
+  <p:notesMasterIdLst>
+    <p:notesMasterId r:id="rId9"/>
+  </p:notesMasterIdLst>
   <p:sldIdLst>
     <p:sldId id="256" r:id="rId2"/>
     <p:sldId id="257" r:id="rId3"/>
@@ -13,10 +16,7 @@
     <p:sldId id="261" r:id="rId7"/>
     <p:sldId id="262" r:id="rId8"/>
   </p:sldIdLst>
-  <p:notesMasterIdLst>
-    <p:notesMasterId r:id="rId9"/>
-  </p:notesMasterIdLst>
-  <p:sldSz cx="9144000" cy="6858000"/>
+  <p:sldSz cx="9144000" cy="6858000" type="screen4x3"/>
   <p:notesSz cx="6858000" cy="9144000"/>
   <p:defaultTextStyle>
     <a:lvl1pPr marL="0" algn="l" defTabSz="914400" rtl="0" eaLnBrk="1" latinLnBrk="0" hangingPunct="1">
@@ -110,6 +110,11 @@
       </a:defRPr>
     </a:lvl9pPr>
   </p:defaultTextStyle>
+  <p:extLst>
+    <p:ext uri="{EFAFB233-063F-42B5-8137-9DF3F51BA10A}">
+      <p15:sldGuideLst xmlns:p15="http://schemas.microsoft.com/office/powerpoint/2012/main"/>
+    </p:ext>
+  </p:extLst>
 </p:presentation>
 </file>
 
@@ -135,234 +140,10 @@
           <a:chExt cx="0" cy="0"/>
         </a:xfrm>
       </p:grpSpPr>
-      <p:sp>
-        <p:nvSpPr>
-          <p:cNvPr id="2" name="Header Placeholder 1"/>
-          <p:cNvSpPr>
-            <a:spLocks noGrp="1"/>
-          </p:cNvSpPr>
-          <p:nvPr>
-            <p:ph type="hdr" sz="quarter"/>
-          </p:nvPr>
-        </p:nvSpPr>
-        <p:spPr>
-          <a:xfrm>
-            <a:off x="0" y="0"/>
-            <a:ext cx="2971800" cy="458788"/>
-          </a:xfrm>
-          <a:prstGeom prst="rect">
-            <a:avLst/>
-          </a:prstGeom>
-        </p:spPr>
-        <p:txBody>
-          <a:bodyPr vert="horz" lIns="91440" tIns="45720" rIns="91440" bIns="45720" rtlCol="0"/>
-          <a:lstStyle>
-            <a:lvl1pPr algn="l">
-              <a:defRPr sz="1200"/>
-            </a:lvl1pPr>
-          </a:lstStyle>
-          <a:p>
-            <a:endParaRPr lang="en-US"/>
-          </a:p>
-        </p:txBody>
-      </p:sp>
-      <p:sp>
-        <p:nvSpPr>
-          <p:cNvPr id="3" name="Date Placeholder 2"/>
-          <p:cNvSpPr>
-            <a:spLocks noGrp="1"/>
-          </p:cNvSpPr>
-          <p:nvPr>
-            <p:ph type="dt" idx="1"/>
-          </p:nvPr>
-        </p:nvSpPr>
-        <p:spPr>
-          <a:xfrm>
-            <a:off x="3884613" y="0"/>
-            <a:ext cx="2971800" cy="458788"/>
-          </a:xfrm>
-          <a:prstGeom prst="rect">
-            <a:avLst/>
-          </a:prstGeom>
-        </p:spPr>
-        <p:txBody>
-          <a:bodyPr vert="horz" lIns="91440" tIns="45720" rIns="91440" bIns="45720" rtlCol="0"/>
-          <a:lstStyle>
-            <a:lvl1pPr algn="r">
-              <a:defRPr sz="1200"/>
-            </a:lvl1pPr>
-          </a:lstStyle>
-          <a:p>
-            <a:fld id="{5282F153-3F37-0F45-9E97-73ACFA13230C}" type="datetimeFigureOut">
-              <a:rPr lang="en-US"/>
-              <a:t>7/23/19</a:t>
-            </a:fld>
-            <a:endParaRPr lang="en-US"/>
-          </a:p>
-        </p:txBody>
-      </p:sp>
-      <p:sp>
-        <p:nvSpPr>
-          <p:cNvPr id="4" name="Slide Image Placeholder 3"/>
-          <p:cNvSpPr>
-            <a:spLocks noGrp="1" noRot="1" noChangeAspect="1"/>
-          </p:cNvSpPr>
-          <p:nvPr>
-            <p:ph type="sldImg" idx="2"/>
-          </p:nvPr>
-        </p:nvSpPr>
-        <p:spPr>
-          <a:xfrm>
-            <a:off x="685800" y="1143000"/>
-            <a:ext cx="5486400" cy="3086100"/>
-          </a:xfrm>
-          <a:prstGeom prst="rect">
-            <a:avLst/>
-          </a:prstGeom>
-          <a:noFill/>
-          <a:ln w="12700">
-            <a:solidFill>
-              <a:prstClr val="black"/>
-            </a:solidFill>
-          </a:ln>
-        </p:spPr>
-        <p:txBody>
-          <a:bodyPr vert="horz" lIns="91440" tIns="45720" rIns="91440" bIns="45720" rtlCol="0" anchor="ctr"/>
-          <a:lstStyle/>
-          <a:p>
-            <a:endParaRPr lang="en-US"/>
-          </a:p>
-        </p:txBody>
-      </p:sp>
-      <p:sp>
-        <p:nvSpPr>
-          <p:cNvPr id="5" name="Notes Placeholder 4"/>
-          <p:cNvSpPr>
-            <a:spLocks noGrp="1"/>
-          </p:cNvSpPr>
-          <p:nvPr>
-            <p:ph type="body" sz="quarter" idx="3"/>
-          </p:nvPr>
-        </p:nvSpPr>
-        <p:spPr>
-          <a:xfrm>
-            <a:off x="685800" y="4400550"/>
-            <a:ext cx="5486400" cy="3600450"/>
-          </a:xfrm>
-          <a:prstGeom prst="rect">
-            <a:avLst/>
-          </a:prstGeom>
-        </p:spPr>
-        <p:txBody>
-          <a:bodyPr vert="horz" lIns="91440" tIns="45720" rIns="91440" bIns="45720" rtlCol="0"/>
-          <a:lstStyle/>
-          <a:p>
-            <a:pPr lvl="0"/>
-            <a:r>
-              <a:rPr lang="en-US"/>
-              <a:t>Click to edit Master text styles</a:t>
-            </a:r>
-          </a:p>
-          <a:p>
-            <a:pPr lvl="1"/>
-            <a:r>
-              <a:rPr lang="en-US"/>
-              <a:t>Second level</a:t>
-            </a:r>
-          </a:p>
-          <a:p>
-            <a:pPr lvl="2"/>
-            <a:r>
-              <a:rPr lang="en-US"/>
-              <a:t>Third level</a:t>
-            </a:r>
-          </a:p>
-          <a:p>
-            <a:pPr lvl="3"/>
-            <a:r>
-              <a:rPr lang="en-US"/>
-              <a:t>Fourth level</a:t>
-            </a:r>
-          </a:p>
-          <a:p>
-            <a:pPr lvl="4"/>
-            <a:r>
-              <a:rPr lang="en-US"/>
-              <a:t>Fifth level</a:t>
-            </a:r>
-          </a:p>
-        </p:txBody>
-      </p:sp>
-      <p:sp>
-        <p:nvSpPr>
-          <p:cNvPr id="6" name="Footer Placeholder 5"/>
-          <p:cNvSpPr>
-            <a:spLocks noGrp="1"/>
-          </p:cNvSpPr>
-          <p:nvPr>
-            <p:ph type="ftr" sz="quarter" idx="4"/>
-          </p:nvPr>
-        </p:nvSpPr>
-        <p:spPr>
-          <a:xfrm>
-            <a:off x="0" y="8685213"/>
-            <a:ext cx="2971800" cy="458787"/>
-          </a:xfrm>
-          <a:prstGeom prst="rect">
-            <a:avLst/>
-          </a:prstGeom>
-        </p:spPr>
-        <p:txBody>
-          <a:bodyPr vert="horz" lIns="91440" tIns="45720" rIns="91440" bIns="45720" rtlCol="0" anchor="b"/>
-          <a:lstStyle>
-            <a:lvl1pPr algn="l">
-              <a:defRPr sz="1200"/>
-            </a:lvl1pPr>
-          </a:lstStyle>
-          <a:p>
-            <a:endParaRPr lang="en-US"/>
-          </a:p>
-        </p:txBody>
-      </p:sp>
-      <p:sp>
-        <p:nvSpPr>
-          <p:cNvPr id="7" name="Slide Number Placeholder 6"/>
-          <p:cNvSpPr>
-            <a:spLocks noGrp="1"/>
-          </p:cNvSpPr>
-          <p:nvPr>
-            <p:ph type="sldNum" sz="quarter" idx="5"/>
-          </p:nvPr>
-        </p:nvSpPr>
-        <p:spPr>
-          <a:xfrm>
-            <a:off x="3884613" y="8685213"/>
-            <a:ext cx="2971800" cy="458787"/>
-          </a:xfrm>
-          <a:prstGeom prst="rect">
-            <a:avLst/>
-          </a:prstGeom>
-        </p:spPr>
-        <p:txBody>
-          <a:bodyPr vert="horz" lIns="91440" tIns="45720" rIns="91440" bIns="45720" rtlCol="0" anchor="b"/>
-          <a:lstStyle>
-            <a:lvl1pPr algn="r">
-              <a:defRPr sz="1200"/>
-            </a:lvl1pPr>
-          </a:lstStyle>
-          <a:p>
-            <a:fld id="{CE5E9CC1-C706-0F49-92D6-E571CC5EEA8F}" type="slidenum">
-              <a:rPr lang="en-US"/>
-              <a:t>‹#›</a:t>
-            </a:fld>
-            <a:endParaRPr lang="en-US"/>
-          </a:p>
-        </p:txBody>
-      </p:sp>
     </p:spTree>
     <p:extLst>
       <p:ext uri="{BB962C8B-B14F-4D97-AF65-F5344CB8AC3E}">
-        <p14:creationId xmlns:p14="http://schemas.microsoft.com/office/powerpoint/2010/main" val="1024086991"/>
+        <p14:creationId xmlns:p14="http://schemas.microsoft.com/office/powerpoint/2010/main" val="3667120354"/>
       </p:ext>
     </p:extLst>
   </p:cSld>
@@ -490,6 +271,13 @@
           </p:nvPr>
         </p:nvSpPr>
         <p:spPr/>
+        <p:txBody>
+          <a:bodyPr/>
+          <a:lstStyle/>
+          <a:p>
+            <a:endParaRPr lang="en-US"/>
+          </a:p>
+        </p:txBody>
       </p:sp>
       <p:sp>
         <p:nvSpPr>
@@ -508,9 +296,24 @@
           <a:p>
             <a:r>
               <a:rPr lang="en-US" dirty="0"/>
-              <a:t>[0:00] Ask the question straight, and let it hang: “Do Christians offer sacrifices? Most of us would say no — that ended at the cross. Half of that is exactly right. The other half will surprise you.” This week closes Unit III and brings the sacrifice thread from Week 2 full circle. Point at Rom 12:1 — the answer is on the screen: you, alive.</a:t>
-            </a:r>
-            <a:endParaRPr lang="en-US" dirty="0"/>
+              <a:t>[0:00] Ask the question straight, and let it hang: “Do Christians offer sacrifices? Most of us would say no </a:t>
+            </a:r>
+            <a:r>
+              <a:rPr lang="en-US"/>
+              <a:t>→ </a:t>
+            </a:r>
+            <a:r>
+              <a:rPr lang="en-US" dirty="0"/>
+              <a:t>that ended at the cross. Half of that is exactly right. The other half will surprise you.” This week closes Unit III and brings the sacrifice thread from Week 2 full circle. Point at Rom 12:1 </a:t>
+            </a:r>
+            <a:r>
+              <a:rPr lang="en-US"/>
+              <a:t>→</a:t>
+            </a:r>
+            <a:r>
+              <a:rPr lang="en-US" dirty="0"/>
+              <a:t> the answer is on the screen: you, alive.</a:t>
+            </a:r>
           </a:p>
         </p:txBody>
       </p:sp>
@@ -578,6 +381,13 @@
           </p:nvPr>
         </p:nvSpPr>
         <p:spPr/>
+        <p:txBody>
+          <a:bodyPr/>
+          <a:lstStyle/>
+          <a:p>
+            <a:endParaRPr lang="en-US"/>
+          </a:p>
+        </p:txBody>
       </p:sp>
       <p:sp>
         <p:nvSpPr>
@@ -597,12 +407,43 @@
             <a:r>
               <a:rPr lang="en-US" dirty="0"/>
               <a:t>[0:00–8:00]
-[CLICK] Heb 10:10,14 — read both. ONCE FOR ALL (ephapax) is the hinge word of Hebrews. Perfected FOR ALL TIME.
-[CLICK] Land “once for all.” This is the guard that keeps the whole week from sounding like works-salvation — the very thing Week 4 warned against. The atonement is not a project we contribute to.
-[CLICK] The contrast — old priests STOOD (work never done); Christ SAT DOWN (work finished). A seated priest is a stunning image; no Levite ever sat in the sanctuary.
-[CLICK] State the tension the rest of the hour resolves: atonement is finished, YET the NT still calls us to offer sacrifices. Not a contradiction — a change of material. Transition: “Here is the turn.”</a:t>
-            </a:r>
-            <a:endParaRPr lang="en-US" dirty="0"/>
+[CLICK] Heb 10:10,14 </a:t>
+            </a:r>
+            <a:r>
+              <a:rPr lang="en-US"/>
+              <a:t>→ </a:t>
+            </a:r>
+            <a:r>
+              <a:rPr lang="en-US" dirty="0"/>
+              <a:t>read both. ONCE FOR ALL (ephapax) is the hinge word of Hebrews. Perfected FOR ALL TIME.
+[CLICK] Land “once for all.” This is the guard that keeps the whole week from sounding like works-salvation </a:t>
+            </a:r>
+            <a:r>
+              <a:rPr lang="en-US"/>
+              <a:t>→ </a:t>
+            </a:r>
+            <a:r>
+              <a:rPr lang="en-US" dirty="0"/>
+              <a:t>the very thing Week 4 warned against. The atonement is not a project we contribute to.
+[CLICK] The contrast </a:t>
+            </a:r>
+            <a:r>
+              <a:rPr lang="en-US"/>
+              <a:t>→ </a:t>
+            </a:r>
+            <a:r>
+              <a:rPr lang="en-US" dirty="0"/>
+              <a:t>old priests STOOD (work never done); Christ SAT DOWN (work finished). A seated priest is a stunning image; no Levite ever sat in the sanctuary.
+[CLICK] State the tension the rest of the hour resolves: atonement is finished, YET the NT still calls us to offer sacrifices. Not a contradiction </a:t>
+            </a:r>
+            <a:r>
+              <a:rPr lang="en-US"/>
+              <a:t>→</a:t>
+            </a:r>
+            <a:r>
+              <a:rPr lang="en-US" dirty="0"/>
+              <a:t> a change of material. Transition: “Here is the turn.”</a:t>
+            </a:r>
           </a:p>
         </p:txBody>
       </p:sp>
@@ -670,6 +511,13 @@
           </p:nvPr>
         </p:nvSpPr>
         <p:spPr/>
+        <p:txBody>
+          <a:bodyPr/>
+          <a:lstStyle/>
+          <a:p>
+            <a:endParaRPr lang="en-US"/>
+          </a:p>
+        </p:txBody>
       </p:sp>
       <p:sp>
         <p:nvSpPr>
@@ -689,12 +537,59 @@
             <a:r>
               <a:rPr lang="en-US" dirty="0"/>
               <a:t>[8:00–20:00]
-[CLICK] Walk the graphic left to right. OLD: the lamb dies INSTEAD of you. CENTER: at the cross, the true Substitute dies once for all (Week-8 territory). NOW: the altar has no fire — because the sacrifice is meant to stay ALIVE. That empty-of-flame altar is the whole point of Rom 12:1.
-[CLICK] Say the hinge: “Sacrifice didn’t end. It changed material.” Pause both sides of it. The substitute has died, so the worshiper himself is now the offering — living.
-[CLICK] Rom 12:1 — “alive” is the shocking word. Every prior sacrifice was dead; this one breathes. Recall Week 2’s NET note: living sacrifices keep crawling off the altar — which is why it must be daily.
-[CLICK] The three named sacrifices — praise, good/generosity, the self. These are concrete; the class can DO them this week. Transition: “And notice what Peter just called you — a priest.”</a:t>
-            </a:r>
-            <a:endParaRPr lang="en-US" dirty="0"/>
+[CLICK] Walk the graphic left to right. OLD: the lamb dies INSTEAD of you. CENTER: at the cross, the true Substitute dies once for all (Week-8 territory). NOW: the altar has no fire </a:t>
+            </a:r>
+            <a:r>
+              <a:rPr lang="en-US"/>
+              <a:t>→ </a:t>
+            </a:r>
+            <a:r>
+              <a:rPr lang="en-US" dirty="0"/>
+              <a:t>because the sacrifice is meant to stay ALIVE. That empty-of-flame altar is the whole point of Rom 12:1.
+[CLICK] Say the hinge: “Sacrifice didn’t end. It changed material.” Pause both sides of it. The substitute has died, so the worshiper himself is now the offering </a:t>
+            </a:r>
+            <a:r>
+              <a:rPr lang="en-US"/>
+              <a:t>→ </a:t>
+            </a:r>
+            <a:r>
+              <a:rPr lang="en-US" dirty="0"/>
+              <a:t>living.
+[CLICK] Rom 12:1 </a:t>
+            </a:r>
+            <a:r>
+              <a:rPr lang="en-US"/>
+              <a:t>→ </a:t>
+            </a:r>
+            <a:r>
+              <a:rPr lang="en-US" dirty="0"/>
+              <a:t>“alive” is the shocking word. Every prior sacrifice was dead; this one breathes. Recall Week 2’s NET note: living sacrifices keep crawling off the altar </a:t>
+            </a:r>
+            <a:r>
+              <a:rPr lang="en-US"/>
+              <a:t>→ </a:t>
+            </a:r>
+            <a:r>
+              <a:rPr lang="en-US" dirty="0"/>
+              <a:t>which is why it must be daily.
+[CLICK] The three named sacrifices </a:t>
+            </a:r>
+            <a:r>
+              <a:rPr lang="en-US"/>
+              <a:t>→ </a:t>
+            </a:r>
+            <a:r>
+              <a:rPr lang="en-US" dirty="0"/>
+              <a:t>praise, good/generosity, the self. These are concrete; the class can DO them this week. Transition: “And notice what Peter just called you </a:t>
+            </a:r>
+            <a:r>
+              <a:rPr lang="en-US"/>
+              <a:t>→</a:t>
+            </a:r>
+            <a:r>
+              <a:rPr lang="en-US" dirty="0"/>
+              <a:t> a priest.”</a:t>
+            </a:r>
           </a:p>
         </p:txBody>
       </p:sp>
@@ -762,6 +657,13 @@
           </p:nvPr>
         </p:nvSpPr>
         <p:spPr/>
+        <p:txBody>
+          <a:bodyPr/>
+          <a:lstStyle/>
+          <a:p>
+            <a:endParaRPr lang="en-US"/>
+          </a:p>
+        </p:txBody>
       </p:sp>
       <p:sp>
         <p:nvSpPr>
@@ -781,12 +683,43 @@
             <a:r>
               <a:rPr lang="en-US" dirty="0"/>
               <a:t>[20:00–32:00]
-[CLICK] 1 Pet 2:5,9 — the priesthood of ALL believers. Not clergy alone; everyone in the room is a priest with an offering to bring.
-[CLICK] The transfer — this is the convicting pivot. Malachi’s complaint was to PRIESTS. You are now the priest. No middleman means no hiding behind “the professionals handle worship.”
-[CLICK] Mal 1:8 — deliver “offer it to your governor!” as the dry, pointed sarcasm it is. Don’t raise your voice; the verse is already sharp. The image: you’d never give your boss the garbage you routinely give God.
-[CLICK] 2 Sam 24:24 — the cleanest quotable in the course. “That cost me nothing.” If they remember one sentence, this. Sets up the discussion question directly. Transition: “So the offering is now yourself. But Paul said TWO things go on the altar.”</a:t>
-            </a:r>
-            <a:endParaRPr lang="en-US" dirty="0"/>
+[CLICK] 1 Pet 2:5,9 </a:t>
+            </a:r>
+            <a:r>
+              <a:rPr lang="en-US"/>
+              <a:t>→ </a:t>
+            </a:r>
+            <a:r>
+              <a:rPr lang="en-US" dirty="0"/>
+              <a:t>the priesthood of ALL believers. Not clergy alone; everyone in the room is a priest with an offering to bring.
+[CLICK] The transfer </a:t>
+            </a:r>
+            <a:r>
+              <a:rPr lang="en-US"/>
+              <a:t>→ </a:t>
+            </a:r>
+            <a:r>
+              <a:rPr lang="en-US" dirty="0"/>
+              <a:t>this is the convicting pivot. Malachi’s complaint was to PRIESTS. You are now the priest. No middleman means no hiding behind “the professionals handle worship.”
+[CLICK] Mal 1:8 </a:t>
+            </a:r>
+            <a:r>
+              <a:rPr lang="en-US"/>
+              <a:t>→ </a:t>
+            </a:r>
+            <a:r>
+              <a:rPr lang="en-US" dirty="0"/>
+              <a:t>deliver “offer it to your governor!” as the dry, pointed sarcasm it is. Don’t raise your voice; the verse is already sharp. The image: you’d never give your boss the garbage you routinely give God.
+[CLICK] 2 Sam 24:24 </a:t>
+            </a:r>
+            <a:r>
+              <a:rPr lang="en-US"/>
+              <a:t>→</a:t>
+            </a:r>
+            <a:r>
+              <a:rPr lang="en-US" dirty="0"/>
+              <a:t> the cleanest quotable in the course. “That cost me nothing.” If they remember one sentence, this. Sets up the discussion question directly. Transition: “So the offering is now yourself. But Paul said TWO things go on the altar.”</a:t>
+            </a:r>
           </a:p>
         </p:txBody>
       </p:sp>
@@ -854,6 +787,13 @@
           </p:nvPr>
         </p:nvSpPr>
         <p:spPr/>
+        <p:txBody>
+          <a:bodyPr/>
+          <a:lstStyle/>
+          <a:p>
+            <a:endParaRPr lang="en-US"/>
+          </a:p>
+        </p:txBody>
       </p:sp>
       <p:sp>
         <p:nvSpPr>
@@ -873,13 +813,52 @@
             <a:r>
               <a:rPr lang="en-US" dirty="0"/>
               <a:t>[32:00–45:00]
-[CLICK] Read Rom 12:1–2 as ONE unit — most people stop at verse 1. The purpose clause in v.2 is the payoff of the entire course.
-[CLICK] Body AND mind. The mind is renewed FOR something: to test and approve the good. Invite them to open Romans 12 and see it — checkable, not asserted.
-[CLICK] The great convergence: Rom 12:2 = Heb 5:14. Discernment (Unit II) and sacrifice (Units I &amp; III) turn out to be the same paragraph. This is the intellectual peak of the course — let it land.
-[CLICK] The reframe: daily Bible reading is not prep for worship; it IS the offering — the daily portion of the living sacrifice. This dignifies the ordinary morning chapter as an altar act.
-[CLICK] The banner — the grace guardrail one more time. Rom 12:1 begins “by the mercies of God.” Thank offering, not payment. To discussion.</a:t>
-            </a:r>
-            <a:endParaRPr lang="en-US" dirty="0"/>
+[CLICK] Read Rom 12:1–2 as ONE unit </a:t>
+            </a:r>
+            <a:r>
+              <a:rPr lang="en-US"/>
+              <a:t>→ </a:t>
+            </a:r>
+            <a:r>
+              <a:rPr lang="en-US" dirty="0"/>
+              <a:t>most people stop at verse 1. The purpose clause in v.2 is the payoff of the entire course.
+[CLICK] Body AND mind. The mind is renewed FOR something: to test and approve the good. Invite them to open Romans 12 and see it </a:t>
+            </a:r>
+            <a:r>
+              <a:rPr lang="en-US"/>
+              <a:t>→ </a:t>
+            </a:r>
+            <a:r>
+              <a:rPr lang="en-US" dirty="0"/>
+              <a:t>checkable, not asserted.
+[CLICK] The great convergence: Rom 12:2 = Heb 5:14. Discernment (Unit II) and sacrifice (Units I &amp; III) turn out to be the same paragraph. This is the intellectual peak of the course </a:t>
+            </a:r>
+            <a:r>
+              <a:rPr lang="en-US"/>
+              <a:t>→ </a:t>
+            </a:r>
+            <a:r>
+              <a:rPr lang="en-US" dirty="0"/>
+              <a:t>let it land.
+[CLICK] The reframe: daily Bible reading is not prep for worship; it IS the offering </a:t>
+            </a:r>
+            <a:r>
+              <a:rPr lang="en-US"/>
+              <a:t>→ </a:t>
+            </a:r>
+            <a:r>
+              <a:rPr lang="en-US" dirty="0"/>
+              <a:t>the daily portion of the living sacrifice. This dignifies the ordinary morning chapter as an altar act.
+[CLICK] The banner </a:t>
+            </a:r>
+            <a:r>
+              <a:rPr lang="en-US"/>
+              <a:t>→</a:t>
+            </a:r>
+            <a:r>
+              <a:rPr lang="en-US" dirty="0"/>
+              <a:t> the grace guardrail one more time. Rom 12:1 begins “by the mercies of God.” Thank offering, not payment. To discussion.</a:t>
+            </a:r>
           </a:p>
         </p:txBody>
       </p:sp>
@@ -947,6 +926,13 @@
           </p:nvPr>
         </p:nvSpPr>
         <p:spPr/>
+        <p:txBody>
+          <a:bodyPr/>
+          <a:lstStyle/>
+          <a:p>
+            <a:endParaRPr lang="en-US"/>
+          </a:p>
+        </p:txBody>
       </p:sp>
       <p:sp>
         <p:nvSpPr>
@@ -966,11 +952,42 @@
             <a:r>
               <a:rPr lang="en-US" dirty="0"/>
               <a:t>[45:00–55:00]
-Q1: The Malachi image made personal — and searching. Most of us give God the exhausted, distracted leftover of our time. Name it first-person (“I’ve brought that lamb”). Do NOT let it curdle into guilt; the frame is grace — what would a FIRSTFRUITS offering of time look like? Concrete, not condemning.
-Q2: The practical companion. “First minutes” = phone, news, email, worry — vs. the Word, prayer. Not legalism about a specific hour; the principle of firstfruits vs. leftovers applied to attention. Seed: “What gets your mind before God does?”
-[CLICK] Read the mirror-not-measuring-stick line — keeps grace in the room.</a:t>
-            </a:r>
-            <a:endParaRPr lang="en-US" dirty="0"/>
+Q1: The Malachi image made personal </a:t>
+            </a:r>
+            <a:r>
+              <a:rPr lang="en-US"/>
+              <a:t>→ </a:t>
+            </a:r>
+            <a:r>
+              <a:rPr lang="en-US" dirty="0"/>
+              <a:t>and searching. Most of us give God the exhausted, distracted leftover of our time. Name it first-person (“I’ve brought that lamb”). Do NOT let it curdle into guilt; the frame is grace </a:t>
+            </a:r>
+            <a:r>
+              <a:rPr lang="en-US"/>
+              <a:t>→ </a:t>
+            </a:r>
+            <a:r>
+              <a:rPr lang="en-US" dirty="0"/>
+              <a:t>what would a FIRSTFRUITS offering of time look like? Concrete, not condemning.
+Q2: The practical companion. “First minutes” = phone, news, email, worry </a:t>
+            </a:r>
+            <a:r>
+              <a:rPr lang="en-US"/>
+              <a:t>→ </a:t>
+            </a:r>
+            <a:r>
+              <a:rPr lang="en-US" dirty="0"/>
+              <a:t>vs. the Word, prayer. Not legalism about a specific hour; the principle of firstfruits vs. leftovers applied to attention. Seed: “What gets your mind before God does?”
+[CLICK] Read the mirror-not-measuring-stick line </a:t>
+            </a:r>
+            <a:r>
+              <a:rPr lang="en-US"/>
+              <a:t>→</a:t>
+            </a:r>
+            <a:r>
+              <a:rPr lang="en-US" dirty="0"/>
+              <a:t> keeps grace in the room.</a:t>
+            </a:r>
           </a:p>
         </p:txBody>
       </p:sp>
@@ -1038,6 +1055,13 @@
           </p:nvPr>
         </p:nvSpPr>
         <p:spPr/>
+        <p:txBody>
+          <a:bodyPr/>
+          <a:lstStyle/>
+          <a:p>
+            <a:endParaRPr lang="en-US"/>
+          </a:p>
+        </p:txBody>
       </p:sp>
       <p:sp>
         <p:nvSpPr>
@@ -1057,12 +1081,35 @@
             <a:r>
               <a:rPr lang="en-US" dirty="0"/>
               <a:t>[55:00 close, ~2 min]
-[CLICK] Next week’s reading — the pivot into Unit IV (church order). Both flags (v.37 “Lord’s command”; “entrusted”) preview the apostolic-appointment argument. Give the class a heads-up: the next two weeks handle genuinely contested ground, and we’ll do it as Bereans — eager AND examining.
+[CLICK] Next week’s reading </a:t>
+            </a:r>
+            <a:r>
+              <a:rPr lang="en-US"/>
+              <a:t>→ </a:t>
+            </a:r>
+            <a:r>
+              <a:rPr lang="en-US" dirty="0"/>
+              <a:t>the pivot into Unit IV (church order). Both flags (v.37 “Lord’s command”; “entrusted”) preview the apostolic-appointment argument. Give the class a heads-up: the next two weeks handle genuinely contested ground, and we’ll do it as Bereans </a:t>
+            </a:r>
+            <a:r>
+              <a:rPr lang="en-US"/>
+              <a:t>→ </a:t>
+            </a:r>
+            <a:r>
+              <a:rPr lang="en-US" dirty="0"/>
+              <a:t>eager AND examining.
 [CLICK] Preview Unit IV.
-[CLICK] Carry sentence — say it together.
+[CLICK] Carry sentence </a:t>
+            </a:r>
+            <a:r>
+              <a:rPr lang="en-US"/>
+              <a:t>→</a:t>
+            </a:r>
+            <a:r>
+              <a:rPr lang="en-US" dirty="0"/>
+              <a:t> say it together.
 [CLICK] Close on 2 Sam 24:24. Dismiss on time.</a:t>
             </a:r>
-            <a:endParaRPr lang="en-US" dirty="0"/>
           </a:p>
         </p:txBody>
       </p:sp>
@@ -1135,6 +1182,11 @@
 <file path=ppt/slideMasters/slideMaster1.xml><?xml version="1.0" encoding="utf-8"?>
 <p:sldMaster xmlns:a="http://schemas.openxmlformats.org/drawingml/2006/main" xmlns:r="http://schemas.openxmlformats.org/officeDocument/2006/relationships" xmlns:p="http://schemas.openxmlformats.org/presentationml/2006/main">
   <p:cSld>
+    <p:bg>
+      <p:bgRef idx="1001">
+        <a:schemeClr val="bg1"/>
+      </p:bgRef>
+    </p:bg>
     <p:spTree>
       <p:nvGrpSpPr>
         <p:cNvPr id="1" name=""/>
@@ -1447,7 +1499,7 @@
           <a:bodyPr wrap="square" lIns="0" tIns="0" rIns="0" bIns="0" rtlCol="0" anchor="t"/>
           <a:lstStyle/>
           <a:p>
-            <a:pPr algn="ctr" indent="0" marL="0">
+            <a:pPr marL="0" indent="0" algn="ctr">
               <a:buNone/>
             </a:pPr>
             <a:r>
@@ -1459,7 +1511,7 @@
                 <a:ea typeface="Arial" pitchFamily="34" charset="-122"/>
                 <a:cs typeface="Arial" pitchFamily="34" charset="-120"/>
               </a:rPr>
-              <a:t>The Obedience of Faith — Week 9  ·  Unit III: Testing</a:t>
+              <a:t>The Obedience of Faith - Week 9  ·  Unit III: Testing</a:t>
             </a:r>
             <a:endParaRPr lang="en-US" sz="1600" dirty="0"/>
           </a:p>
@@ -1486,7 +1538,7 @@
           <a:bodyPr wrap="square" lIns="0" tIns="0" rIns="0" bIns="0" rtlCol="0" anchor="t"/>
           <a:lstStyle/>
           <a:p>
-            <a:pPr algn="ctr" indent="0" marL="0">
+            <a:pPr marL="0" indent="0" algn="ctr">
               <a:buNone/>
             </a:pPr>
             <a:r>
@@ -1525,7 +1577,7 @@
           <a:bodyPr wrap="square" lIns="0" tIns="0" rIns="0" bIns="0" rtlCol="0" anchor="t"/>
           <a:lstStyle/>
           <a:p>
-            <a:pPr algn="ctr" indent="0" marL="0">
+            <a:pPr marL="0" indent="0" algn="ctr">
               <a:buNone/>
             </a:pPr>
             <a:r>
@@ -1537,7 +1589,29 @@
                 <a:ea typeface="Arial" pitchFamily="34" charset="-122"/>
                 <a:cs typeface="Arial" pitchFamily="34" charset="-120"/>
               </a:rPr>
-              <a:t>Living Sacrifice, Royal Priesthood — do Christians offer sacrifices?</a:t>
+              <a:t>Living Sacrifice, Royal Priesthood </a:t>
+            </a:r>
+            <a:r>
+              <a:rPr lang="en-US" sz="1900" b="1" i="1">
+                <a:solidFill>
+                  <a:srgbClr val="1F497D"/>
+                </a:solidFill>
+                <a:latin typeface="Arial" pitchFamily="34" charset="0"/>
+                <a:ea typeface="Arial" pitchFamily="34" charset="-122"/>
+                <a:cs typeface="Arial" pitchFamily="34" charset="-120"/>
+              </a:rPr>
+              <a:t>→</a:t>
+            </a:r>
+            <a:r>
+              <a:rPr lang="en-US" sz="1900" b="1" i="1" dirty="0">
+                <a:solidFill>
+                  <a:srgbClr val="1F497D"/>
+                </a:solidFill>
+                <a:latin typeface="Arial" pitchFamily="34" charset="0"/>
+                <a:ea typeface="Arial" pitchFamily="34" charset="-122"/>
+                <a:cs typeface="Arial" pitchFamily="34" charset="-120"/>
+              </a:rPr>
+              <a:t> do Christians offer sacrifices?</a:t>
             </a:r>
             <a:endParaRPr lang="en-US" sz="1600" dirty="0"/>
           </a:p>
@@ -1552,7 +1626,7 @@
         <p:spPr>
           <a:xfrm>
             <a:off x="914400" y="3063240"/>
-            <a:ext cx="7315200" cy="1371600"/>
+            <a:ext cx="7315200" cy="1691640"/>
           </a:xfrm>
           <a:prstGeom prst="rect">
             <a:avLst/>
@@ -1564,11 +1638,11 @@
           <a:bodyPr wrap="square" lIns="0" tIns="0" rIns="0" bIns="0" rtlCol="0" anchor="t"/>
           <a:lstStyle/>
           <a:p>
-            <a:pPr algn="ctr" indent="0" marL="0">
+            <a:pPr marL="0" indent="0" algn="ctr">
               <a:buNone/>
             </a:pPr>
             <a:r>
-              <a:rPr lang="en-US" sz="2100" i="1" dirty="0">
+              <a:rPr lang="en-US" sz="2800" i="1" dirty="0">
                 <a:solidFill>
                   <a:srgbClr val="000000"/>
                 </a:solidFill>
@@ -1576,19 +1650,60 @@
                 <a:ea typeface="Arial" pitchFamily="34" charset="-122"/>
                 <a:cs typeface="Arial" pitchFamily="34" charset="-120"/>
               </a:rPr>
-              <a:t>“present your bodies as a sacrifice — alive, holy, and pleasing to God — which is your reasonable service.”</a:t>
-            </a:r>
-            <a:pPr algn="ctr" indent="0" marL="0">
+              <a:t>“present your bodies as a sacrifice </a:t>
+            </a:r>
+            <a:r>
+              <a:rPr lang="en-US" sz="2800" i="1">
+                <a:solidFill>
+                  <a:srgbClr val="000000"/>
+                </a:solidFill>
+                <a:latin typeface="Arial" pitchFamily="34" charset="0"/>
+                <a:ea typeface="Arial" pitchFamily="34" charset="-122"/>
+                <a:cs typeface="Arial" pitchFamily="34" charset="-120"/>
+              </a:rPr>
+              <a:t>→ </a:t>
+            </a:r>
+            <a:r>
+              <a:rPr lang="en-US" sz="2800" i="1" dirty="0">
+                <a:solidFill>
+                  <a:srgbClr val="000000"/>
+                </a:solidFill>
+                <a:latin typeface="Arial" pitchFamily="34" charset="0"/>
+                <a:ea typeface="Arial" pitchFamily="34" charset="-122"/>
+                <a:cs typeface="Arial" pitchFamily="34" charset="-120"/>
+              </a:rPr>
+              <a:t>alive, holy, and pleasing to God </a:t>
+            </a:r>
+            <a:r>
+              <a:rPr lang="en-US" sz="2800" i="1">
+                <a:solidFill>
+                  <a:srgbClr val="000000"/>
+                </a:solidFill>
+                <a:latin typeface="Arial" pitchFamily="34" charset="0"/>
+                <a:ea typeface="Arial" pitchFamily="34" charset="-122"/>
+                <a:cs typeface="Arial" pitchFamily="34" charset="-120"/>
+              </a:rPr>
+              <a:t>→</a:t>
+            </a:r>
+            <a:r>
+              <a:rPr lang="en-US" sz="2800" i="1" dirty="0">
+                <a:solidFill>
+                  <a:srgbClr val="000000"/>
+                </a:solidFill>
+                <a:latin typeface="Arial" pitchFamily="34" charset="0"/>
+                <a:ea typeface="Arial" pitchFamily="34" charset="-122"/>
+                <a:cs typeface="Arial" pitchFamily="34" charset="-120"/>
+              </a:rPr>
+              <a:t> which is your reasonable service.”</a:t>
+            </a:r>
+            <a:endParaRPr lang="en-US" sz="2000" dirty="0"/>
+          </a:p>
+          <a:p>
+            <a:pPr marL="0" indent="0" algn="ctr">
               <a:buNone/>
             </a:pPr>
-            <a:endParaRPr lang="en-US" sz="1600" dirty="0"/>
-          </a:p>
-          <a:p>
-            <a:pPr algn="ctr" indent="0" marL="0">
-              <a:buNone/>
-            </a:pPr>
-            <a:r>
-              <a:rPr lang="en-US" sz="1800" dirty="0">
+            <a:r>
+              <a:rPr lang="en-US" sz="2400" dirty="0">
                 <a:solidFill>
                   <a:srgbClr val="000000"/>
                 </a:solidFill>
@@ -1598,7 +1713,7 @@
               </a:rPr>
               <a:t>(Romans 12:1)</a:t>
             </a:r>
-            <a:endParaRPr lang="en-US" sz="1600" dirty="0"/>
+            <a:endParaRPr lang="en-US" sz="2000" dirty="0"/>
           </a:p>
         </p:txBody>
       </p:sp>
@@ -1610,7 +1725,7 @@
         </p:nvSpPr>
         <p:spPr>
           <a:xfrm>
-            <a:off x="914400" y="4754880"/>
+            <a:off x="914400" y="5440680"/>
             <a:ext cx="7315200" cy="457200"/>
           </a:xfrm>
           <a:prstGeom prst="rect">
@@ -1623,18 +1738,18 @@
           <a:bodyPr wrap="square" lIns="0" tIns="0" rIns="0" bIns="0" rtlCol="0" anchor="t"/>
           <a:lstStyle/>
           <a:p>
-            <a:pPr algn="ctr" indent="0" marL="0">
+            <a:pPr marL="0" indent="0" algn="ctr">
               <a:buNone/>
             </a:pPr>
             <a:r>
-              <a:rPr lang="en-US" sz="1600" b="1" u="sng" dirty="0">
+              <a:rPr lang="en-US" sz="2000" b="1" u="sng" dirty="0">
                 <a:solidFill>
                   <a:srgbClr val="4F81BD"/>
                 </a:solidFill>
                 <a:latin typeface="Arial" pitchFamily="34" charset="0"/>
                 <a:ea typeface="Arial" pitchFamily="34" charset="-122"/>
                 <a:cs typeface="Arial" pitchFamily="34" charset="-120"/>
-                <a:hlinkClick r:id="rId1" invalidUrl="" action="" tgtFrame="" tooltip="" history="1" highlightClick="0" endSnd="0">
+                <a:hlinkClick r:id="rId3">
                   <a:extLst>
                     <a:ext uri="{A12FA001-AC4F-418D-AE19-62706E023703}">
                       <ahyp:hlinkClr xmlns:ahyp="http://schemas.microsoft.com/office/drawing/2018/hyperlinkcolor" val="tx"/>
@@ -1642,9 +1757,38 @@
                   </a:extLst>
                 </a:hlinkClick>
               </a:rPr>
-              <a:t>https://tinyurl.com/TeachTheWord</a:t>
-            </a:r>
-            <a:endParaRPr lang="en-US" sz="1600" dirty="0"/>
+              <a:t>https://</a:t>
+            </a:r>
+            <a:r>
+              <a:rPr lang="en-US" sz="2000" b="1" u="sng" dirty="0" err="1">
+                <a:solidFill>
+                  <a:srgbClr val="4F81BD"/>
+                </a:solidFill>
+                <a:latin typeface="Arial" pitchFamily="34" charset="0"/>
+                <a:ea typeface="Arial" pitchFamily="34" charset="-122"/>
+                <a:cs typeface="Arial" pitchFamily="34" charset="-120"/>
+                <a:hlinkClick r:id="rId3">
+                  <a:extLst>
+                    <a:ext uri="{A12FA001-AC4F-418D-AE19-62706E023703}">
+                      <ahyp:hlinkClr xmlns:ahyp="http://schemas.microsoft.com/office/drawing/2018/hyperlinkcolor" val="tx"/>
+                    </a:ext>
+                  </a:extLst>
+                </a:hlinkClick>
+              </a:rPr>
+              <a:t>TeachTheWord</a:t>
+            </a:r>
+            <a:r>
+              <a:rPr lang="en-US" sz="2000" b="1" u="sng" dirty="0" err="1">
+                <a:solidFill>
+                  <a:srgbClr val="4F81BD"/>
+                </a:solidFill>
+                <a:latin typeface="Arial" pitchFamily="34" charset="0"/>
+                <a:ea typeface="Arial" pitchFamily="34" charset="-122"/>
+                <a:cs typeface="Arial" pitchFamily="34" charset="-120"/>
+              </a:rPr>
+              <a:t>.Church</a:t>
+            </a:r>
+            <a:endParaRPr lang="en-US" sz="2000" dirty="0"/>
           </a:p>
         </p:txBody>
       </p:sp>
@@ -1694,7 +1838,7 @@
           <a:bodyPr wrap="square" lIns="0" tIns="0" rIns="0" bIns="0" rtlCol="0" anchor="t"/>
           <a:lstStyle/>
           <a:p>
-            <a:pPr algn="l" indent="0" marL="0">
+            <a:pPr marL="0" indent="0" algn="l">
               <a:buNone/>
             </a:pPr>
             <a:r>
@@ -1733,11 +1877,11 @@
           <a:bodyPr wrap="square" lIns="0" tIns="0" rIns="0" bIns="0" rtlCol="0" anchor="t"/>
           <a:lstStyle/>
           <a:p>
-            <a:pPr algn="l" indent="0" marL="0">
+            <a:pPr marL="0" indent="0" algn="l">
               <a:buNone/>
             </a:pPr>
             <a:r>
-              <a:rPr lang="en-US" sz="1300" b="1" dirty="0">
+              <a:rPr lang="en-US" sz="2000" b="1" dirty="0">
                 <a:solidFill>
                   <a:srgbClr val="4F81BD"/>
                 </a:solidFill>
@@ -1745,9 +1889,32 @@
                 <a:ea typeface="Arial" pitchFamily="34" charset="-122"/>
                 <a:cs typeface="Arial" pitchFamily="34" charset="-120"/>
               </a:rPr>
-              <a:t>The atoning sacrifice is finished — once for all</a:t>
-            </a:r>
-            <a:endParaRPr lang="en-US" sz="1600" dirty="0"/>
+              <a:t>The atoning sacrifice is finished </a:t>
+            </a:r>
+            <a:r>
+              <a:rPr lang="en-US" sz="2000" b="1" dirty="0">
+                <a:solidFill>
+                  <a:srgbClr val="4F81BD"/>
+                </a:solidFill>
+                <a:latin typeface="Arial" pitchFamily="34" charset="0"/>
+                <a:ea typeface="Arial" pitchFamily="34" charset="-122"/>
+                <a:cs typeface="Arial" pitchFamily="34" charset="-120"/>
+                <a:sym typeface="Wingdings" pitchFamily="2" charset="2"/>
+              </a:rPr>
+              <a:t></a:t>
+            </a:r>
+            <a:r>
+              <a:rPr lang="en-US" sz="2000" b="1" dirty="0">
+                <a:solidFill>
+                  <a:srgbClr val="4F81BD"/>
+                </a:solidFill>
+                <a:latin typeface="Arial" pitchFamily="34" charset="0"/>
+                <a:ea typeface="Arial" pitchFamily="34" charset="-122"/>
+                <a:cs typeface="Arial" pitchFamily="34" charset="-120"/>
+              </a:rPr>
+              <a:t> once for all</a:t>
+            </a:r>
+            <a:endParaRPr lang="en-US" sz="2800" dirty="0"/>
           </a:p>
         </p:txBody>
       </p:sp>
@@ -1760,59 +1927,6 @@
         <p:spPr>
           <a:xfrm>
             <a:off x="365760" y="1188720"/>
-            <a:ext cx="8412480" cy="1234440"/>
-          </a:xfrm>
-          <a:prstGeom prst="rect">
-            <a:avLst/>
-          </a:prstGeom>
-          <a:noFill/>
-          <a:ln/>
-        </p:spPr>
-        <p:txBody>
-          <a:bodyPr wrap="square" lIns="0" tIns="0" rIns="0" bIns="0" rtlCol="0" anchor="t"/>
-          <a:lstStyle/>
-          <a:p>
-            <a:pPr algn="l" indent="0" marL="0">
-              <a:buNone/>
-            </a:pPr>
-            <a:r>
-              <a:rPr lang="en-US" sz="1600" b="1" i="1" dirty="0">
-                <a:solidFill>
-                  <a:srgbClr val="000000"/>
-                </a:solidFill>
-                <a:latin typeface="Arial" pitchFamily="34" charset="0"/>
-                <a:ea typeface="Arial" pitchFamily="34" charset="-122"/>
-                <a:cs typeface="Arial" pitchFamily="34" charset="-120"/>
-              </a:rPr>
-              <a:t>“And by his will we have been made holy through the offering of the body of Jesus Christ once for all… For by one offering he has perfected for all time those who are made holy.” </a:t>
-            </a:r>
-            <a:pPr algn="l" indent="0" marL="0">
-              <a:buNone/>
-            </a:pPr>
-            <a:r>
-              <a:rPr lang="en-US" sz="1500" b="1" dirty="0">
-                <a:solidFill>
-                  <a:srgbClr val="000000"/>
-                </a:solidFill>
-                <a:latin typeface="Arial" pitchFamily="34" charset="0"/>
-                <a:ea typeface="Arial" pitchFamily="34" charset="-122"/>
-                <a:cs typeface="Arial" pitchFamily="34" charset="-120"/>
-              </a:rPr>
-              <a:t>(Hebrews 10:10, 14)</a:t>
-            </a:r>
-            <a:endParaRPr lang="en-US" sz="1600" dirty="0"/>
-          </a:p>
-        </p:txBody>
-      </p:sp>
-      <p:sp>
-        <p:nvSpPr>
-          <p:cNvPr id="5" name="a2"/>
-          <p:cNvSpPr txBox="1"/>
-          <p:nvPr/>
-        </p:nvSpPr>
-        <p:spPr>
-          <a:xfrm>
-            <a:off x="365760" y="2697480"/>
             <a:ext cx="8412480" cy="1005840"/>
           </a:xfrm>
           <a:prstGeom prst="rect">
@@ -1825,25 +1939,72 @@
           <a:bodyPr wrap="square" lIns="0" tIns="0" rIns="0" bIns="0" rtlCol="0" anchor="t"/>
           <a:lstStyle/>
           <a:p>
-            <a:pPr algn="l" indent="0" marL="0">
+            <a:pPr marL="0" indent="0" algn="l">
               <a:buNone/>
             </a:pPr>
             <a:r>
-              <a:rPr lang="en-US" sz="1800" b="1" dirty="0">
-                <a:solidFill>
-                  <a:srgbClr val="1F497D"/>
-                </a:solidFill>
-                <a:latin typeface="Arial" pitchFamily="34" charset="0"/>
-                <a:ea typeface="Arial" pitchFamily="34" charset="-122"/>
-                <a:cs typeface="Arial" pitchFamily="34" charset="-120"/>
-              </a:rPr>
-              <a:t>Once for all. </a:t>
-            </a:r>
-            <a:pPr algn="l" indent="0" marL="0">
+              <a:rPr lang="en-US" sz="2000" b="1" i="1" dirty="0">
+                <a:solidFill>
+                  <a:srgbClr val="000000"/>
+                </a:solidFill>
+                <a:latin typeface="Arial" pitchFamily="34" charset="0"/>
+                <a:ea typeface="Arial" pitchFamily="34" charset="-122"/>
+                <a:cs typeface="Arial" pitchFamily="34" charset="-120"/>
+              </a:rPr>
+              <a:t>“And by his will we have been made holy through the offering of the body of Jesus Christ once for all… For by one offering he has perfected for all time those who are made holy.” </a:t>
+            </a:r>
+            <a:r>
+              <a:rPr lang="en-US" b="1" dirty="0">
+                <a:solidFill>
+                  <a:srgbClr val="000000"/>
+                </a:solidFill>
+                <a:latin typeface="Arial" pitchFamily="34" charset="0"/>
+                <a:ea typeface="Arial" pitchFamily="34" charset="-122"/>
+                <a:cs typeface="Arial" pitchFamily="34" charset="-120"/>
+              </a:rPr>
+              <a:t>(Hebrews 10:10, 14)</a:t>
+            </a:r>
+            <a:endParaRPr lang="en-US" sz="2000" dirty="0"/>
+          </a:p>
+        </p:txBody>
+      </p:sp>
+      <p:sp>
+        <p:nvSpPr>
+          <p:cNvPr id="5" name="a2"/>
+          <p:cNvSpPr txBox="1"/>
+          <p:nvPr/>
+        </p:nvSpPr>
+        <p:spPr>
+          <a:xfrm>
+            <a:off x="365760" y="2496312"/>
+            <a:ext cx="8412480" cy="1005840"/>
+          </a:xfrm>
+          <a:prstGeom prst="rect">
+            <a:avLst/>
+          </a:prstGeom>
+          <a:noFill/>
+          <a:ln/>
+        </p:spPr>
+        <p:txBody>
+          <a:bodyPr wrap="square" lIns="0" tIns="0" rIns="0" bIns="0" rtlCol="0" anchor="t"/>
+          <a:lstStyle/>
+          <a:p>
+            <a:pPr marL="0" indent="0" algn="l">
               <a:buNone/>
             </a:pPr>
             <a:r>
-              <a:rPr lang="en-US" sz="1500" dirty="0">
+              <a:rPr lang="en-US" sz="2400" b="1" dirty="0">
+                <a:solidFill>
+                  <a:srgbClr val="1F497D"/>
+                </a:solidFill>
+                <a:latin typeface="Arial" pitchFamily="34" charset="0"/>
+                <a:ea typeface="Arial" pitchFamily="34" charset="-122"/>
+                <a:cs typeface="Arial" pitchFamily="34" charset="-120"/>
+              </a:rPr>
+              <a:t>Once for all. </a:t>
+            </a:r>
+            <a:r>
+              <a:rPr lang="en-US" dirty="0">
                 <a:solidFill>
                   <a:srgbClr val="000000"/>
                 </a:solidFill>
@@ -1853,7 +2014,7 @@
               </a:rPr>
               <a:t>The atoning work is complete, finished, unrepeatable. No altar you build, no sacrifice you offer, adds a single thing to it. It cannot be improved, only received.</a:t>
             </a:r>
-            <a:endParaRPr lang="en-US" sz="1600" dirty="0"/>
+            <a:endParaRPr lang="en-US" sz="2000" dirty="0"/>
           </a:p>
         </p:txBody>
       </p:sp>
@@ -1866,7 +2027,7 @@
         <p:spPr>
           <a:xfrm>
             <a:off x="365760" y="3840480"/>
-            <a:ext cx="8412480" cy="1051560"/>
+            <a:ext cx="8412480" cy="849086"/>
           </a:xfrm>
           <a:prstGeom prst="rect">
             <a:avLst/>
@@ -1878,11 +2039,11 @@
           <a:bodyPr wrap="square" lIns="0" tIns="0" rIns="0" bIns="0" rtlCol="0" anchor="t"/>
           <a:lstStyle/>
           <a:p>
-            <a:pPr algn="l" indent="0" marL="0">
+            <a:pPr marL="0" indent="0" algn="l">
               <a:buNone/>
             </a:pPr>
             <a:r>
-              <a:rPr lang="en-US" sz="1450" b="1" dirty="0">
+              <a:rPr lang="en-US" b="1" dirty="0">
                 <a:solidFill>
                   <a:srgbClr val="1F497D"/>
                 </a:solidFill>
@@ -1892,11 +2053,8 @@
               </a:rPr>
               <a:t>Hebrews drives it home by contrast: </a:t>
             </a:r>
-            <a:pPr algn="l" indent="0" marL="0">
-              <a:buNone/>
-            </a:pPr>
-            <a:r>
-              <a:rPr lang="en-US" sz="1450" dirty="0">
+            <a:r>
+              <a:rPr lang="en-US" dirty="0">
                 <a:solidFill>
                   <a:srgbClr val="000000"/>
                 </a:solidFill>
@@ -1906,11 +2064,8 @@
               </a:rPr>
               <a:t>the old priests stood </a:t>
             </a:r>
-            <a:pPr algn="l" indent="0" marL="0">
-              <a:buNone/>
-            </a:pPr>
-            <a:r>
-              <a:rPr lang="en-US" sz="1450" b="1" i="1" dirty="0">
+            <a:r>
+              <a:rPr lang="en-US" b="1" i="1" dirty="0">
                 <a:solidFill>
                   <a:srgbClr val="000000"/>
                 </a:solidFill>
@@ -1920,11 +2075,8 @@
               </a:rPr>
               <a:t>daily</a:t>
             </a:r>
-            <a:pPr algn="l" indent="0" marL="0">
-              <a:buNone/>
-            </a:pPr>
-            <a:r>
-              <a:rPr lang="en-US" sz="1450" dirty="0">
+            <a:r>
+              <a:rPr lang="en-US" dirty="0">
                 <a:solidFill>
                   <a:srgbClr val="000000"/>
                 </a:solidFill>
@@ -1934,11 +2086,8 @@
               </a:rPr>
               <a:t>, offering the same sacrifices that could never take away sins (10:11). Christ offered </a:t>
             </a:r>
-            <a:pPr algn="l" indent="0" marL="0">
-              <a:buNone/>
-            </a:pPr>
-            <a:r>
-              <a:rPr lang="en-US" sz="1450" b="1" i="1" dirty="0">
+            <a:r>
+              <a:rPr lang="en-US" b="1" i="1" dirty="0">
                 <a:solidFill>
                   <a:srgbClr val="000000"/>
                 </a:solidFill>
@@ -1948,11 +2097,8 @@
               </a:rPr>
               <a:t>one</a:t>
             </a:r>
-            <a:pPr algn="l" indent="0" marL="0">
-              <a:buNone/>
-            </a:pPr>
-            <a:r>
-              <a:rPr lang="en-US" sz="1450" dirty="0">
+            <a:r>
+              <a:rPr lang="en-US" dirty="0">
                 <a:solidFill>
                   <a:srgbClr val="000000"/>
                 </a:solidFill>
@@ -1960,9 +2106,9 @@
                 <a:ea typeface="Arial" pitchFamily="34" charset="-122"/>
                 <a:cs typeface="Arial" pitchFamily="34" charset="-120"/>
               </a:rPr>
-              <a:t> sacrifice and “sat down” (10:12) — the posture of finished work.</a:t>
-            </a:r>
-            <a:endParaRPr lang="en-US" sz="1600" dirty="0"/>
+              <a:t> sacrifice and “sat down” (10:12) → the posture of finished work.</a:t>
+            </a:r>
+            <a:endParaRPr lang="en-US" sz="2000" dirty="0"/>
           </a:p>
         </p:txBody>
       </p:sp>
@@ -1975,7 +2121,7 @@
         <p:spPr>
           <a:xfrm>
             <a:off x="365760" y="5029200"/>
-            <a:ext cx="8412480" cy="1097280"/>
+            <a:ext cx="8412480" cy="849086"/>
           </a:xfrm>
           <a:prstGeom prst="rect">
             <a:avLst/>
@@ -1987,11 +2133,11 @@
           <a:bodyPr wrap="square" lIns="0" tIns="0" rIns="0" bIns="0" rtlCol="0" anchor="t"/>
           <a:lstStyle/>
           <a:p>
-            <a:pPr algn="l" indent="0" marL="0">
+            <a:pPr marL="0" indent="0" algn="l">
               <a:buNone/>
             </a:pPr>
             <a:r>
-              <a:rPr lang="en-US" sz="1500" b="1" dirty="0">
+              <a:rPr lang="en-US" b="1" dirty="0">
                 <a:solidFill>
                   <a:srgbClr val="B0413E"/>
                 </a:solidFill>
@@ -2001,11 +2147,8 @@
               </a:rPr>
               <a:t>Hold this guard the whole hour: </a:t>
             </a:r>
-            <a:pPr algn="l" indent="0" marL="0">
-              <a:buNone/>
-            </a:pPr>
-            <a:r>
-              <a:rPr lang="en-US" sz="1450" dirty="0">
+            <a:r>
+              <a:rPr lang="en-US" dirty="0">
                 <a:solidFill>
                   <a:srgbClr val="000000"/>
                 </a:solidFill>
@@ -2013,9 +2156,9 @@
                 <a:ea typeface="Arial" pitchFamily="34" charset="-122"/>
                 <a:cs typeface="Arial" pitchFamily="34" charset="-120"/>
               </a:rPr>
-              <a:t>nothing we say next reopens the cross. Never let anyone — including yourself — put you back under a system of earning. And yet… the New Testament keeps using sacrifice language for us. Why?</a:t>
-            </a:r>
-            <a:endParaRPr lang="en-US" sz="1600" dirty="0"/>
+              <a:t>nothing we say next reopens the cross. Never let anyone → including yourself → put you back under a system of earning. And yet… the New Testament keeps using sacrifice language for us. Why?</a:t>
+            </a:r>
+            <a:endParaRPr lang="en-US" sz="2000" dirty="0"/>
           </a:p>
         </p:txBody>
       </p:sp>
@@ -2033,26 +2176,26 @@
               <p:cTn id="2" dur="indefinite" nodeType="mainSeq">
                 <p:childTnLst>
                   <p:par>
-                    <p:cTn id="7" fill="hold">
+                    <p:cTn id="3" fill="hold">
                       <p:stCondLst>
                         <p:cond delay="indefinite"/>
                       </p:stCondLst>
                       <p:childTnLst>
                         <p:par>
-                          <p:cTn id="8" fill="hold">
+                          <p:cTn id="4" fill="hold">
                             <p:stCondLst>
                               <p:cond delay="0"/>
                             </p:stCondLst>
                             <p:childTnLst>
                               <p:par>
-                                <p:cTn id="3" presetID="42" presetClass="entr" presetSubtype="0" fill="hold" grpId="0" nodeType="clickEffect">
+                                <p:cTn id="5" presetID="42" presetClass="entr" presetSubtype="0" fill="hold" nodeType="clickEffect">
                                   <p:stCondLst>
                                     <p:cond delay="0"/>
                                   </p:stCondLst>
                                   <p:childTnLst>
                                     <p:set>
                                       <p:cBhvr>
-                                        <p:cTn id="4" dur="1" fill="hold">
+                                        <p:cTn id="6" dur="1" fill="hold">
                                           <p:stCondLst>
                                             <p:cond delay="0"/>
                                           </p:stCondLst>
@@ -2070,7 +2213,7 @@
                                     </p:set>
                                     <p:animEffect transition="in" filter="fade">
                                       <p:cBhvr>
-                                        <p:cTn id="5" dur="1000"/>
+                                        <p:cTn id="7" dur="1000"/>
                                         <p:tgtEl>
                                           <p:spTgt spid="4"/>
                                         </p:tgtEl>
@@ -2078,7 +2221,7 @@
                                     </p:animEffect>
                                     <p:anim calcmode="lin" valueType="num">
                                       <p:cBhvr>
-                                        <p:cTn id="6" dur="1000" fill="hold"/>
+                                        <p:cTn id="8" dur="1000" fill="hold"/>
                                         <p:tgtEl>
                                           <p:spTgt spid="4"/>
                                         </p:tgtEl>
@@ -2109,26 +2252,26 @@
                     </p:cTn>
                   </p:par>
                   <p:par>
-                    <p:cTn id="13" fill="hold">
+                    <p:cTn id="9" fill="hold">
                       <p:stCondLst>
                         <p:cond delay="indefinite"/>
                       </p:stCondLst>
                       <p:childTnLst>
                         <p:par>
-                          <p:cTn id="14" fill="hold">
+                          <p:cTn id="10" fill="hold">
                             <p:stCondLst>
                               <p:cond delay="0"/>
                             </p:stCondLst>
                             <p:childTnLst>
                               <p:par>
-                                <p:cTn id="9" presetID="42" presetClass="entr" presetSubtype="0" fill="hold" grpId="0" nodeType="clickEffect">
+                                <p:cTn id="11" presetID="42" presetClass="entr" presetSubtype="0" fill="hold" nodeType="clickEffect">
                                   <p:stCondLst>
                                     <p:cond delay="0"/>
                                   </p:stCondLst>
                                   <p:childTnLst>
                                     <p:set>
                                       <p:cBhvr>
-                                        <p:cTn id="10" dur="1" fill="hold">
+                                        <p:cTn id="12" dur="1" fill="hold">
                                           <p:stCondLst>
                                             <p:cond delay="0"/>
                                           </p:stCondLst>
@@ -2146,7 +2289,7 @@
                                     </p:set>
                                     <p:animEffect transition="in" filter="fade">
                                       <p:cBhvr>
-                                        <p:cTn id="11" dur="1000"/>
+                                        <p:cTn id="13" dur="1000"/>
                                         <p:tgtEl>
                                           <p:spTgt spid="5"/>
                                         </p:tgtEl>
@@ -2154,7 +2297,7 @@
                                     </p:animEffect>
                                     <p:anim calcmode="lin" valueType="num">
                                       <p:cBhvr>
-                                        <p:cTn id="12" dur="1000" fill="hold"/>
+                                        <p:cTn id="14" dur="1000" fill="hold"/>
                                         <p:tgtEl>
                                           <p:spTgt spid="5"/>
                                         </p:tgtEl>
@@ -2185,26 +2328,26 @@
                     </p:cTn>
                   </p:par>
                   <p:par>
-                    <p:cTn id="19" fill="hold">
+                    <p:cTn id="15" fill="hold">
                       <p:stCondLst>
                         <p:cond delay="indefinite"/>
                       </p:stCondLst>
                       <p:childTnLst>
                         <p:par>
-                          <p:cTn id="20" fill="hold">
+                          <p:cTn id="16" fill="hold">
                             <p:stCondLst>
                               <p:cond delay="0"/>
                             </p:stCondLst>
                             <p:childTnLst>
                               <p:par>
-                                <p:cTn id="15" presetID="42" presetClass="entr" presetSubtype="0" fill="hold" grpId="0" nodeType="clickEffect">
+                                <p:cTn id="17" presetID="42" presetClass="entr" presetSubtype="0" fill="hold" nodeType="clickEffect">
                                   <p:stCondLst>
                                     <p:cond delay="0"/>
                                   </p:stCondLst>
                                   <p:childTnLst>
                                     <p:set>
                                       <p:cBhvr>
-                                        <p:cTn id="16" dur="1" fill="hold">
+                                        <p:cTn id="18" dur="1" fill="hold">
                                           <p:stCondLst>
                                             <p:cond delay="0"/>
                                           </p:stCondLst>
@@ -2222,7 +2365,7 @@
                                     </p:set>
                                     <p:animEffect transition="in" filter="fade">
                                       <p:cBhvr>
-                                        <p:cTn id="17" dur="1000"/>
+                                        <p:cTn id="19" dur="1000"/>
                                         <p:tgtEl>
                                           <p:spTgt spid="6"/>
                                         </p:tgtEl>
@@ -2230,7 +2373,7 @@
                                     </p:animEffect>
                                     <p:anim calcmode="lin" valueType="num">
                                       <p:cBhvr>
-                                        <p:cTn id="18" dur="1000" fill="hold"/>
+                                        <p:cTn id="20" dur="1000" fill="hold"/>
                                         <p:tgtEl>
                                           <p:spTgt spid="6"/>
                                         </p:tgtEl>
@@ -2261,26 +2404,26 @@
                     </p:cTn>
                   </p:par>
                   <p:par>
-                    <p:cTn id="25" fill="hold">
+                    <p:cTn id="21" fill="hold">
                       <p:stCondLst>
                         <p:cond delay="indefinite"/>
                       </p:stCondLst>
                       <p:childTnLst>
                         <p:par>
-                          <p:cTn id="26" fill="hold">
+                          <p:cTn id="22" fill="hold">
                             <p:stCondLst>
                               <p:cond delay="0"/>
                             </p:stCondLst>
                             <p:childTnLst>
                               <p:par>
-                                <p:cTn id="21" presetID="42" presetClass="entr" presetSubtype="0" fill="hold" grpId="0" nodeType="clickEffect">
+                                <p:cTn id="23" presetID="42" presetClass="entr" presetSubtype="0" fill="hold" nodeType="clickEffect">
                                   <p:stCondLst>
                                     <p:cond delay="0"/>
                                   </p:stCondLst>
                                   <p:childTnLst>
                                     <p:set>
                                       <p:cBhvr>
-                                        <p:cTn id="22" dur="1" fill="hold">
+                                        <p:cTn id="24" dur="1" fill="hold">
                                           <p:stCondLst>
                                             <p:cond delay="0"/>
                                           </p:stCondLst>
@@ -2298,7 +2441,7 @@
                                     </p:set>
                                     <p:animEffect transition="in" filter="fade">
                                       <p:cBhvr>
-                                        <p:cTn id="23" dur="1000"/>
+                                        <p:cTn id="25" dur="1000"/>
                                         <p:tgtEl>
                                           <p:spTgt spid="7"/>
                                         </p:tgtEl>
@@ -2306,7 +2449,7 @@
                                     </p:animEffect>
                                     <p:anim calcmode="lin" valueType="num">
                                       <p:cBhvr>
-                                        <p:cTn id="24" dur="1000" fill="hold"/>
+                                        <p:cTn id="26" dur="1000" fill="hold"/>
                                         <p:tgtEl>
                                           <p:spTgt spid="7"/>
                                         </p:tgtEl>
@@ -2399,7 +2542,7 @@
           <a:bodyPr wrap="square" lIns="0" tIns="0" rIns="0" bIns="0" rtlCol="0" anchor="t"/>
           <a:lstStyle/>
           <a:p>
-            <a:pPr algn="l" indent="0" marL="0">
+            <a:pPr marL="0" indent="0" algn="l">
               <a:buNone/>
             </a:pPr>
             <a:r>
@@ -2411,7 +2554,29 @@
                 <a:ea typeface="Arial" pitchFamily="34" charset="-122"/>
                 <a:cs typeface="Arial" pitchFamily="34" charset="-120"/>
               </a:rPr>
-              <a:t>The Turn: Sacrifice Didn’t End — It Changed Material</a:t>
+              <a:t>The Turn: Sacrifice Didn’t End </a:t>
+            </a:r>
+            <a:r>
+              <a:rPr lang="en-US" sz="2600" b="1">
+                <a:solidFill>
+                  <a:srgbClr val="1F497D"/>
+                </a:solidFill>
+                <a:latin typeface="Arial" pitchFamily="34" charset="0"/>
+                <a:ea typeface="Arial" pitchFamily="34" charset="-122"/>
+                <a:cs typeface="Arial" pitchFamily="34" charset="-120"/>
+              </a:rPr>
+              <a:t>→</a:t>
+            </a:r>
+            <a:r>
+              <a:rPr lang="en-US" sz="2600" b="1" dirty="0">
+                <a:solidFill>
+                  <a:srgbClr val="1F497D"/>
+                </a:solidFill>
+                <a:latin typeface="Arial" pitchFamily="34" charset="0"/>
+                <a:ea typeface="Arial" pitchFamily="34" charset="-122"/>
+                <a:cs typeface="Arial" pitchFamily="34" charset="-120"/>
+              </a:rPr>
+              <a:t> It Changed Material</a:t>
             </a:r>
             <a:endParaRPr lang="en-US" sz="1600" dirty="0"/>
           </a:p>
@@ -2438,11 +2603,11 @@
           <a:bodyPr wrap="square" lIns="0" tIns="0" rIns="0" bIns="0" rtlCol="0" anchor="t"/>
           <a:lstStyle/>
           <a:p>
-            <a:pPr algn="l" indent="0" marL="0">
+            <a:pPr marL="0" indent="0" algn="l">
               <a:buNone/>
             </a:pPr>
             <a:r>
-              <a:rPr lang="en-US" sz="1300" b="1" dirty="0">
+              <a:rPr lang="en-US" sz="2000" b="1" dirty="0">
                 <a:solidFill>
                   <a:srgbClr val="4F81BD"/>
                 </a:solidFill>
@@ -2450,36 +2615,12 @@
                 <a:ea typeface="Arial" pitchFamily="34" charset="-122"/>
                 <a:cs typeface="Arial" pitchFamily="34" charset="-120"/>
               </a:rPr>
-              <a:t>Romans 12:1 — the Substitute has died, so now YOU go on the altar</a:t>
-            </a:r>
-            <a:endParaRPr lang="en-US" sz="1600" dirty="0"/>
+              <a:t>Romans 12:1 → the Substitute has died, so now YOU go on the altar</a:t>
+            </a:r>
+            <a:endParaRPr lang="en-US" sz="2800" dirty="0"/>
           </a:p>
         </p:txBody>
       </p:sp>
-      <p:pic>
-        <p:nvPicPr>
-          <p:cNvPr id="4" name="imgM" descr="material.png">    </p:cNvPr>
-          <p:cNvPicPr>
-            <a:picLocks noChangeAspect="1"/>
-          </p:cNvPicPr>
-          <p:nvPr/>
-        </p:nvPicPr>
-        <p:blipFill>
-          <a:blip r:embed="rId1"/>
-          <a:stretch>
-            <a:fillRect/>
-          </a:stretch>
-        </p:blipFill>
-        <p:spPr>
-          <a:xfrm>
-            <a:off x="640080" y="1143000"/>
-            <a:ext cx="7863840" cy="1207008"/>
-          </a:xfrm>
-          <a:prstGeom prst="rect">
-            <a:avLst/>
-          </a:prstGeom>
-        </p:spPr>
-      </p:pic>
       <p:sp>
         <p:nvSpPr>
           <p:cNvPr id="5" name="b1"/>
@@ -2488,8 +2629,8 @@
         </p:nvSpPr>
         <p:spPr>
           <a:xfrm>
-            <a:off x="365760" y="2514600"/>
-            <a:ext cx="8412480" cy="1005840"/>
+            <a:off x="365760" y="2606039"/>
+            <a:ext cx="8412480" cy="847276"/>
           </a:xfrm>
           <a:prstGeom prst="rect">
             <a:avLst/>
@@ -2501,11 +2642,11 @@
           <a:bodyPr wrap="square" lIns="0" tIns="0" rIns="0" bIns="0" rtlCol="0" anchor="t"/>
           <a:lstStyle/>
           <a:p>
-            <a:pPr algn="l" indent="0" marL="0">
+            <a:pPr marL="0" indent="0" algn="l">
               <a:buNone/>
             </a:pPr>
             <a:r>
-              <a:rPr lang="en-US" sz="1450" dirty="0">
+              <a:rPr lang="en-US" dirty="0">
                 <a:solidFill>
                   <a:srgbClr val="000000"/>
                 </a:solidFill>
@@ -2513,13 +2654,10 @@
                 <a:ea typeface="Arial" pitchFamily="34" charset="-122"/>
                 <a:cs typeface="Arial" pitchFamily="34" charset="-120"/>
               </a:rPr>
-              <a:t>Under the old covenant a substitute died in your place — you brought the lamb, and it went on the altar instead of you. </a:t>
-            </a:r>
-            <a:pPr algn="l" indent="0" marL="0">
-              <a:buNone/>
-            </a:pPr>
-            <a:r>
-              <a:rPr lang="en-US" sz="1500" b="1" dirty="0">
+              <a:t>Under the old covenant a substitute died in your place → you brought the lamb, and it went on the altar instead of you. </a:t>
+            </a:r>
+            <a:r>
+              <a:rPr lang="en-US" b="1" dirty="0">
                 <a:solidFill>
                   <a:srgbClr val="1F497D"/>
                 </a:solidFill>
@@ -2527,9 +2665,9 @@
                 <a:ea typeface="Arial" pitchFamily="34" charset="-122"/>
                 <a:cs typeface="Arial" pitchFamily="34" charset="-120"/>
               </a:rPr>
-              <a:t>Now the true Substitute has died, once for all. So what goes on the altar? You do — alive.</a:t>
-            </a:r>
-            <a:endParaRPr lang="en-US" sz="1600" dirty="0"/>
+              <a:t>Now the true Substitute has died, once for all. So, what goes on the altar? You do → alive.</a:t>
+            </a:r>
+            <a:endParaRPr lang="en-US" sz="2000" dirty="0"/>
           </a:p>
         </p:txBody>
       </p:sp>
@@ -2541,8 +2679,8 @@
         </p:nvSpPr>
         <p:spPr>
           <a:xfrm>
-            <a:off x="365760" y="3611880"/>
-            <a:ext cx="8412480" cy="1005840"/>
+            <a:off x="365760" y="3611879"/>
+            <a:ext cx="8412480" cy="1221377"/>
           </a:xfrm>
           <a:prstGeom prst="rect">
             <a:avLst/>
@@ -2554,11 +2692,11 @@
           <a:bodyPr wrap="square" lIns="0" tIns="0" rIns="0" bIns="0" rtlCol="0" anchor="t"/>
           <a:lstStyle/>
           <a:p>
-            <a:pPr algn="l" indent="0" marL="0">
+            <a:pPr marL="0" indent="0" algn="l">
               <a:buNone/>
             </a:pPr>
             <a:r>
-              <a:rPr lang="en-US" sz="1500" b="1" i="1" dirty="0">
+              <a:rPr lang="en-US" sz="2000" b="1" i="1" dirty="0">
                 <a:solidFill>
                   <a:srgbClr val="000000"/>
                 </a:solidFill>
@@ -2566,13 +2704,27 @@
                 <a:ea typeface="Arial" pitchFamily="34" charset="-122"/>
                 <a:cs typeface="Arial" pitchFamily="34" charset="-120"/>
               </a:rPr>
-              <a:t>“present your bodies as a sacrifice — alive, holy, and pleasing to God — which is your reasonable service.” </a:t>
-            </a:r>
-            <a:pPr algn="l" indent="0" marL="0">
+              <a:t>“present your bodies as a sacrifice → alive, holy, and pleasing to God → which is your reasonable service.” </a:t>
+            </a:r>
+            <a:r>
+              <a:rPr lang="en-US" sz="2000" b="1" dirty="0">
+                <a:solidFill>
+                  <a:srgbClr val="000000"/>
+                </a:solidFill>
+                <a:latin typeface="Arial" pitchFamily="34" charset="0"/>
+                <a:ea typeface="Arial" pitchFamily="34" charset="-122"/>
+                <a:cs typeface="Arial" pitchFamily="34" charset="-120"/>
+              </a:rPr>
+              <a:t>(Romans 12:1)</a:t>
+            </a:r>
+            <a:endParaRPr lang="en-US" sz="2400" dirty="0"/>
+          </a:p>
+          <a:p>
+            <a:pPr marL="0" indent="0" algn="l">
               <a:buNone/>
             </a:pPr>
             <a:r>
-              <a:rPr lang="en-US" sz="1400" b="1" dirty="0">
+              <a:rPr lang="en-US" dirty="0">
                 <a:solidFill>
                   <a:srgbClr val="000000"/>
                 </a:solidFill>
@@ -2580,29 +2732,9 @@
                 <a:ea typeface="Arial" pitchFamily="34" charset="-122"/>
                 <a:cs typeface="Arial" pitchFamily="34" charset="-120"/>
               </a:rPr>
-              <a:t>(Romans 12:1)</a:t>
-            </a:r>
-            <a:pPr algn="l" indent="0" marL="0">
-              <a:buNone/>
-            </a:pPr>
-            <a:endParaRPr lang="en-US" sz="1600" dirty="0"/>
-          </a:p>
-          <a:p>
-            <a:pPr algn="l" indent="0" marL="0">
-              <a:buNone/>
-            </a:pPr>
-            <a:r>
-              <a:rPr lang="en-US" sz="1350" dirty="0">
-                <a:solidFill>
-                  <a:srgbClr val="000000"/>
-                </a:solidFill>
-                <a:latin typeface="Arial" pitchFamily="34" charset="0"/>
-                <a:ea typeface="Arial" pitchFamily="34" charset="-122"/>
-                <a:cs typeface="Arial" pitchFamily="34" charset="-120"/>
-              </a:rPr>
               <a:t>The symbol has given way to the reality it always pointed toward: a whole life laid down, and kept alive to keep laying down.</a:t>
             </a:r>
-            <a:endParaRPr lang="en-US" sz="1600" dirty="0"/>
+            <a:endParaRPr lang="en-US" sz="2400" dirty="0"/>
           </a:p>
         </p:txBody>
       </p:sp>
@@ -2614,8 +2746,8 @@
         </p:nvSpPr>
         <p:spPr>
           <a:xfrm>
-            <a:off x="365760" y="4754880"/>
-            <a:ext cx="8412480" cy="1371600"/>
+            <a:off x="365760" y="4991820"/>
+            <a:ext cx="8412480" cy="1756452"/>
           </a:xfrm>
           <a:prstGeom prst="rect">
             <a:avLst/>
@@ -2627,11 +2759,11 @@
           <a:bodyPr wrap="square" lIns="0" tIns="0" rIns="0" bIns="0" rtlCol="0" anchor="t"/>
           <a:lstStyle/>
           <a:p>
-            <a:pPr algn="l" indent="0" marL="0">
+            <a:pPr marL="0" indent="0" algn="l">
               <a:buNone/>
             </a:pPr>
             <a:r>
-              <a:rPr lang="en-US" sz="1400" b="1" dirty="0">
+              <a:rPr lang="en-US" sz="2000" b="1" dirty="0">
                 <a:solidFill>
                   <a:srgbClr val="1F497D"/>
                 </a:solidFill>
@@ -2642,11 +2774,8 @@
               <a:t>The New Covenant sacrifices, named plainly:
 </a:t>
             </a:r>
-            <a:pPr algn="l" indent="0" marL="0">
-              <a:buNone/>
-            </a:pPr>
-            <a:r>
-              <a:rPr lang="en-US" sz="1350" dirty="0">
+            <a:r>
+              <a:rPr lang="en-US" dirty="0">
                 <a:solidFill>
                   <a:srgbClr val="000000"/>
                 </a:solidFill>
@@ -2654,14 +2783,10 @@
                 <a:ea typeface="Arial" pitchFamily="34" charset="-122"/>
                 <a:cs typeface="Arial" pitchFamily="34" charset="-120"/>
               </a:rPr>
-              <a:t>▪  Praise — “a sacrifice of praise… the fruit of lips that confess his name” (Heb 13:15)
-</a:t>
-            </a:r>
-            <a:pPr algn="l" indent="0" marL="0">
-              <a:buNone/>
-            </a:pPr>
-            <a:r>
-              <a:rPr lang="en-US" sz="1350" dirty="0">
+              <a:t>▪  Praise → </a:t>
+            </a:r>
+            <a:r>
+              <a:rPr lang="en-US" i="1" dirty="0">
                 <a:solidFill>
                   <a:srgbClr val="000000"/>
                 </a:solidFill>
@@ -2669,14 +2794,10 @@
                 <a:ea typeface="Arial" pitchFamily="34" charset="-122"/>
                 <a:cs typeface="Arial" pitchFamily="34" charset="-120"/>
               </a:rPr>
-              <a:t>▪  Good done &amp; possessions shared — “with such sacrifices God is pleased” (Heb 13:16)
-</a:t>
-            </a:r>
-            <a:pPr algn="l" indent="0" marL="0">
-              <a:buNone/>
-            </a:pPr>
-            <a:r>
-              <a:rPr lang="en-US" sz="1350" dirty="0">
+              <a:t>“a sacrifice of praise… the fruit of lips that confess his name” </a:t>
+            </a:r>
+            <a:r>
+              <a:rPr lang="en-US" dirty="0">
                 <a:solidFill>
                   <a:srgbClr val="000000"/>
                 </a:solidFill>
@@ -2684,12 +2805,66 @@
                 <a:ea typeface="Arial" pitchFamily="34" charset="-122"/>
                 <a:cs typeface="Arial" pitchFamily="34" charset="-120"/>
               </a:rPr>
-              <a:t>▪  Your very self — “a holy priesthood, to offer spiritual sacrifices” (1 Pet 2:5)</a:t>
-            </a:r>
-            <a:endParaRPr lang="en-US" sz="1600" dirty="0"/>
+              <a:t>(Heb 13:15)
+▪  Good done &amp; possessions shared → </a:t>
+            </a:r>
+            <a:r>
+              <a:rPr lang="en-US" i="1" dirty="0">
+                <a:solidFill>
+                  <a:srgbClr val="000000"/>
+                </a:solidFill>
+                <a:latin typeface="Arial" pitchFamily="34" charset="0"/>
+                <a:ea typeface="Arial" pitchFamily="34" charset="-122"/>
+                <a:cs typeface="Arial" pitchFamily="34" charset="-120"/>
+              </a:rPr>
+              <a:t>“with such sacrifices God is pleased” </a:t>
+            </a:r>
+            <a:r>
+              <a:rPr lang="en-US" dirty="0">
+                <a:solidFill>
+                  <a:srgbClr val="000000"/>
+                </a:solidFill>
+                <a:latin typeface="Arial" pitchFamily="34" charset="0"/>
+                <a:ea typeface="Arial" pitchFamily="34" charset="-122"/>
+                <a:cs typeface="Arial" pitchFamily="34" charset="-120"/>
+              </a:rPr>
+              <a:t>(Heb 13:16)
+▪  Your very self → “a holy priesthood, to offer spiritual sacrifices” (1 Pet 2:5)</a:t>
+            </a:r>
+            <a:endParaRPr lang="en-US" sz="2400" dirty="0"/>
           </a:p>
         </p:txBody>
       </p:sp>
+      <p:pic>
+        <p:nvPicPr>
+          <p:cNvPr id="8" name="d3i" descr="material.png">
+            <a:extLst>
+              <a:ext uri="{FF2B5EF4-FFF2-40B4-BE49-F238E27FC236}">
+                <a16:creationId xmlns:a16="http://schemas.microsoft.com/office/drawing/2014/main" id="{018160EB-69B5-CEDF-3B3C-EB6AAF1FE112}"/>
+              </a:ext>
+            </a:extLst>
+          </p:cNvPr>
+          <p:cNvPicPr>
+            <a:picLocks noChangeAspect="1"/>
+          </p:cNvPicPr>
+          <p:nvPr/>
+        </p:nvPicPr>
+        <p:blipFill>
+          <a:blip r:embed="rId3"/>
+          <a:stretch>
+            <a:fillRect/>
+          </a:stretch>
+        </p:blipFill>
+        <p:spPr>
+          <a:xfrm>
+            <a:off x="1920240" y="626917"/>
+            <a:ext cx="5303520" cy="1819656"/>
+          </a:xfrm>
+          <a:prstGeom prst="rect">
+            <a:avLst/>
+          </a:prstGeom>
+        </p:spPr>
+      </p:pic>
     </p:spTree>
   </p:cSld>
   <p:clrMapOvr>
@@ -2704,32 +2879,32 @@
               <p:cTn id="2" dur="indefinite" nodeType="mainSeq">
                 <p:childTnLst>
                   <p:par>
-                    <p:cTn id="7" fill="hold">
+                    <p:cTn id="3" fill="hold">
                       <p:stCondLst>
                         <p:cond delay="indefinite"/>
                       </p:stCondLst>
                       <p:childTnLst>
                         <p:par>
-                          <p:cTn id="8" fill="hold">
+                          <p:cTn id="4" fill="hold">
                             <p:stCondLst>
                               <p:cond delay="0"/>
                             </p:stCondLst>
                             <p:childTnLst>
                               <p:par>
-                                <p:cTn id="3" presetID="42" presetClass="entr" presetSubtype="0" fill="hold" grpId="0" nodeType="clickEffect">
+                                <p:cTn id="5" presetID="42" presetClass="entr" presetSubtype="0" fill="hold" nodeType="clickEffect">
                                   <p:stCondLst>
                                     <p:cond delay="0"/>
                                   </p:stCondLst>
                                   <p:childTnLst>
                                     <p:set>
                                       <p:cBhvr>
-                                        <p:cTn id="4" dur="1" fill="hold">
+                                        <p:cTn id="6" dur="1" fill="hold">
                                           <p:stCondLst>
                                             <p:cond delay="0"/>
                                           </p:stCondLst>
                                         </p:cTn>
                                         <p:tgtEl>
-                                          <p:spTgt spid="4"/>
+                                          <p:spTgt spid="6"/>
                                         </p:tgtEl>
                                         <p:attrNameLst>
                                           <p:attrName>style.visibility</p:attrName>
@@ -2741,17 +2916,17 @@
                                     </p:set>
                                     <p:animEffect transition="in" filter="fade">
                                       <p:cBhvr>
-                                        <p:cTn id="5" dur="1000"/>
-                                        <p:tgtEl>
-                                          <p:spTgt spid="4"/>
+                                        <p:cTn id="7" dur="1000"/>
+                                        <p:tgtEl>
+                                          <p:spTgt spid="6"/>
                                         </p:tgtEl>
                                       </p:cBhvr>
                                     </p:animEffect>
                                     <p:anim calcmode="lin" valueType="num">
                                       <p:cBhvr>
-                                        <p:cTn id="6" dur="1000" fill="hold"/>
-                                        <p:tgtEl>
-                                          <p:spTgt spid="4"/>
+                                        <p:cTn id="8" dur="1000" fill="hold"/>
+                                        <p:tgtEl>
+                                          <p:spTgt spid="6"/>
                                         </p:tgtEl>
                                         <p:attrNameLst>
                                           <p:attrName>ppt_y</p:attrName>
@@ -2780,32 +2955,32 @@
                     </p:cTn>
                   </p:par>
                   <p:par>
-                    <p:cTn id="13" fill="hold">
+                    <p:cTn id="9" fill="hold">
                       <p:stCondLst>
                         <p:cond delay="indefinite"/>
                       </p:stCondLst>
                       <p:childTnLst>
                         <p:par>
-                          <p:cTn id="14" fill="hold">
+                          <p:cTn id="10" fill="hold">
                             <p:stCondLst>
                               <p:cond delay="0"/>
                             </p:stCondLst>
                             <p:childTnLst>
                               <p:par>
-                                <p:cTn id="9" presetID="42" presetClass="entr" presetSubtype="0" fill="hold" grpId="0" nodeType="clickEffect">
+                                <p:cTn id="11" presetID="42" presetClass="entr" presetSubtype="0" fill="hold" nodeType="clickEffect">
                                   <p:stCondLst>
                                     <p:cond delay="0"/>
                                   </p:stCondLst>
                                   <p:childTnLst>
                                     <p:set>
                                       <p:cBhvr>
-                                        <p:cTn id="10" dur="1" fill="hold">
+                                        <p:cTn id="12" dur="1" fill="hold">
                                           <p:stCondLst>
                                             <p:cond delay="0"/>
                                           </p:stCondLst>
                                         </p:cTn>
                                         <p:tgtEl>
-                                          <p:spTgt spid="5"/>
+                                          <p:spTgt spid="7"/>
                                         </p:tgtEl>
                                         <p:attrNameLst>
                                           <p:attrName>style.visibility</p:attrName>
@@ -2817,167 +2992,15 @@
                                     </p:set>
                                     <p:animEffect transition="in" filter="fade">
                                       <p:cBhvr>
-                                        <p:cTn id="11" dur="1000"/>
-                                        <p:tgtEl>
-                                          <p:spTgt spid="5"/>
+                                        <p:cTn id="13" dur="1000"/>
+                                        <p:tgtEl>
+                                          <p:spTgt spid="7"/>
                                         </p:tgtEl>
                                       </p:cBhvr>
                                     </p:animEffect>
                                     <p:anim calcmode="lin" valueType="num">
                                       <p:cBhvr>
-                                        <p:cTn id="12" dur="1000" fill="hold"/>
-                                        <p:tgtEl>
-                                          <p:spTgt spid="5"/>
-                                        </p:tgtEl>
-                                        <p:attrNameLst>
-                                          <p:attrName>ppt_y</p:attrName>
-                                        </p:attrNameLst>
-                                      </p:cBhvr>
-                                      <p:tavLst>
-                                        <p:tav tm="0">
-                                          <p:val>
-                                            <p:strVal val="#ppt_y+.1"/>
-                                          </p:val>
-                                        </p:tav>
-                                        <p:tav tm="100000">
-                                          <p:val>
-                                            <p:strVal val="#ppt_y"/>
-                                          </p:val>
-                                        </p:tav>
-                                      </p:tavLst>
-                                    </p:anim>
-                                  </p:childTnLst>
-                                </p:cTn>
-                              </p:par>
-                            </p:childTnLst>
-                          </p:cTn>
-                        </p:par>
-                      </p:childTnLst>
-                    </p:cTn>
-                  </p:par>
-                  <p:par>
-                    <p:cTn id="19" fill="hold">
-                      <p:stCondLst>
-                        <p:cond delay="indefinite"/>
-                      </p:stCondLst>
-                      <p:childTnLst>
-                        <p:par>
-                          <p:cTn id="20" fill="hold">
-                            <p:stCondLst>
-                              <p:cond delay="0"/>
-                            </p:stCondLst>
-                            <p:childTnLst>
-                              <p:par>
-                                <p:cTn id="15" presetID="42" presetClass="entr" presetSubtype="0" fill="hold" grpId="0" nodeType="clickEffect">
-                                  <p:stCondLst>
-                                    <p:cond delay="0"/>
-                                  </p:stCondLst>
-                                  <p:childTnLst>
-                                    <p:set>
-                                      <p:cBhvr>
-                                        <p:cTn id="16" dur="1" fill="hold">
-                                          <p:stCondLst>
-                                            <p:cond delay="0"/>
-                                          </p:stCondLst>
-                                        </p:cTn>
-                                        <p:tgtEl>
-                                          <p:spTgt spid="6"/>
-                                        </p:tgtEl>
-                                        <p:attrNameLst>
-                                          <p:attrName>style.visibility</p:attrName>
-                                        </p:attrNameLst>
-                                      </p:cBhvr>
-                                      <p:to>
-                                        <p:strVal val="visible"/>
-                                      </p:to>
-                                    </p:set>
-                                    <p:animEffect transition="in" filter="fade">
-                                      <p:cBhvr>
-                                        <p:cTn id="17" dur="1000"/>
-                                        <p:tgtEl>
-                                          <p:spTgt spid="6"/>
-                                        </p:tgtEl>
-                                      </p:cBhvr>
-                                    </p:animEffect>
-                                    <p:anim calcmode="lin" valueType="num">
-                                      <p:cBhvr>
-                                        <p:cTn id="18" dur="1000" fill="hold"/>
-                                        <p:tgtEl>
-                                          <p:spTgt spid="6"/>
-                                        </p:tgtEl>
-                                        <p:attrNameLst>
-                                          <p:attrName>ppt_y</p:attrName>
-                                        </p:attrNameLst>
-                                      </p:cBhvr>
-                                      <p:tavLst>
-                                        <p:tav tm="0">
-                                          <p:val>
-                                            <p:strVal val="#ppt_y+.1"/>
-                                          </p:val>
-                                        </p:tav>
-                                        <p:tav tm="100000">
-                                          <p:val>
-                                            <p:strVal val="#ppt_y"/>
-                                          </p:val>
-                                        </p:tav>
-                                      </p:tavLst>
-                                    </p:anim>
-                                  </p:childTnLst>
-                                </p:cTn>
-                              </p:par>
-                            </p:childTnLst>
-                          </p:cTn>
-                        </p:par>
-                      </p:childTnLst>
-                    </p:cTn>
-                  </p:par>
-                  <p:par>
-                    <p:cTn id="25" fill="hold">
-                      <p:stCondLst>
-                        <p:cond delay="indefinite"/>
-                      </p:stCondLst>
-                      <p:childTnLst>
-                        <p:par>
-                          <p:cTn id="26" fill="hold">
-                            <p:stCondLst>
-                              <p:cond delay="0"/>
-                            </p:stCondLst>
-                            <p:childTnLst>
-                              <p:par>
-                                <p:cTn id="21" presetID="42" presetClass="entr" presetSubtype="0" fill="hold" grpId="0" nodeType="clickEffect">
-                                  <p:stCondLst>
-                                    <p:cond delay="0"/>
-                                  </p:stCondLst>
-                                  <p:childTnLst>
-                                    <p:set>
-                                      <p:cBhvr>
-                                        <p:cTn id="22" dur="1" fill="hold">
-                                          <p:stCondLst>
-                                            <p:cond delay="0"/>
-                                          </p:stCondLst>
-                                        </p:cTn>
-                                        <p:tgtEl>
-                                          <p:spTgt spid="7"/>
-                                        </p:tgtEl>
-                                        <p:attrNameLst>
-                                          <p:attrName>style.visibility</p:attrName>
-                                        </p:attrNameLst>
-                                      </p:cBhvr>
-                                      <p:to>
-                                        <p:strVal val="visible"/>
-                                      </p:to>
-                                    </p:set>
-                                    <p:animEffect transition="in" filter="fade">
-                                      <p:cBhvr>
-                                        <p:cTn id="23" dur="1000"/>
-                                        <p:tgtEl>
-                                          <p:spTgt spid="7"/>
-                                        </p:tgtEl>
-                                      </p:cBhvr>
-                                    </p:animEffect>
-                                    <p:anim calcmode="lin" valueType="num">
-                                      <p:cBhvr>
-                                        <p:cTn id="24" dur="1000" fill="hold"/>
+                                        <p:cTn id="14" dur="1000" fill="hold"/>
                                         <p:tgtEl>
                                           <p:spTgt spid="7"/>
                                         </p:tgtEl>
@@ -3070,7 +3093,7 @@
           <a:bodyPr wrap="square" lIns="0" tIns="0" rIns="0" bIns="0" rtlCol="0" anchor="t"/>
           <a:lstStyle/>
           <a:p>
-            <a:pPr algn="l" indent="0" marL="0">
+            <a:pPr marL="0" indent="0" algn="l">
               <a:buNone/>
             </a:pPr>
             <a:r>
@@ -3109,11 +3132,11 @@
           <a:bodyPr wrap="square" lIns="0" tIns="0" rIns="0" bIns="0" rtlCol="0" anchor="t"/>
           <a:lstStyle/>
           <a:p>
-            <a:pPr algn="l" indent="0" marL="0">
+            <a:pPr marL="0" indent="0" algn="l">
               <a:buNone/>
             </a:pPr>
             <a:r>
-              <a:rPr lang="en-US" sz="1300" b="1" dirty="0">
+              <a:rPr lang="en-US" sz="2000" b="1" dirty="0">
                 <a:solidFill>
                   <a:srgbClr val="4F81BD"/>
                 </a:solidFill>
@@ -3123,7 +3146,7 @@
               </a:rPr>
               <a:t>Malachi’s question arrives with no middleman</a:t>
             </a:r>
-            <a:endParaRPr lang="en-US" sz="1600" dirty="0"/>
+            <a:endParaRPr lang="en-US" sz="2800" dirty="0"/>
           </a:p>
         </p:txBody>
       </p:sp>
@@ -3136,7 +3159,7 @@
         <p:spPr>
           <a:xfrm>
             <a:off x="365760" y="1143000"/>
-            <a:ext cx="8412480" cy="868680"/>
+            <a:ext cx="8412480" cy="681229"/>
           </a:xfrm>
           <a:prstGeom prst="rect">
             <a:avLst/>
@@ -3148,11 +3171,11 @@
           <a:bodyPr wrap="square" lIns="0" tIns="0" rIns="0" bIns="0" rtlCol="0" anchor="t"/>
           <a:lstStyle/>
           <a:p>
-            <a:pPr algn="l" indent="0" marL="0">
+            <a:pPr marL="0" indent="0" algn="l">
               <a:buNone/>
             </a:pPr>
             <a:r>
-              <a:rPr lang="en-US" sz="1500" b="1" i="1" dirty="0">
+              <a:rPr lang="en-US" b="1" i="1" dirty="0">
                 <a:solidFill>
                   <a:srgbClr val="000000"/>
                 </a:solidFill>
@@ -3162,11 +3185,8 @@
               </a:rPr>
               <a:t>“you are… a royal priesthood… a holy priesthood, to offer spiritual sacrifices acceptable to God through Jesus Christ.” </a:t>
             </a:r>
-            <a:pPr algn="l" indent="0" marL="0">
-              <a:buNone/>
-            </a:pPr>
-            <a:r>
-              <a:rPr lang="en-US" sz="1400" b="1" dirty="0">
+            <a:r>
+              <a:rPr lang="en-US" b="1" dirty="0">
                 <a:solidFill>
                   <a:srgbClr val="000000"/>
                 </a:solidFill>
@@ -3176,7 +3196,7 @@
               </a:rPr>
               <a:t>(1 Pet 2:5, 9)</a:t>
             </a:r>
-            <a:endParaRPr lang="en-US" sz="1600" dirty="0"/>
+            <a:endParaRPr lang="en-US" sz="2000" dirty="0"/>
           </a:p>
         </p:txBody>
       </p:sp>
@@ -3188,7 +3208,7 @@
         </p:nvSpPr>
         <p:spPr>
           <a:xfrm>
-            <a:off x="365760" y="2103120"/>
+            <a:off x="365760" y="2048256"/>
             <a:ext cx="8412480" cy="914400"/>
           </a:xfrm>
           <a:prstGeom prst="rect">
@@ -3201,11 +3221,11 @@
           <a:bodyPr wrap="square" lIns="0" tIns="0" rIns="0" bIns="0" rtlCol="0" anchor="t"/>
           <a:lstStyle/>
           <a:p>
-            <a:pPr algn="l" indent="0" marL="0">
+            <a:pPr marL="0" indent="0" algn="l">
               <a:buNone/>
             </a:pPr>
             <a:r>
-              <a:rPr lang="en-US" sz="1500" b="1" dirty="0">
+              <a:rPr lang="en-US" b="1" dirty="0">
                 <a:solidFill>
                   <a:srgbClr val="1F497D"/>
                 </a:solidFill>
@@ -3215,11 +3235,8 @@
               </a:rPr>
               <a:t>Feel the weight of that. </a:t>
             </a:r>
-            <a:pPr algn="l" indent="0" marL="0">
-              <a:buNone/>
-            </a:pPr>
-            <a:r>
-              <a:rPr lang="en-US" sz="1450" dirty="0">
+            <a:r>
+              <a:rPr lang="en-US" dirty="0">
                 <a:solidFill>
                   <a:srgbClr val="000000"/>
                 </a:solidFill>
@@ -3227,9 +3244,9 @@
                 <a:ea typeface="Arial" pitchFamily="34" charset="-122"/>
                 <a:cs typeface="Arial" pitchFamily="34" charset="-120"/>
               </a:rPr>
-              <a:t>Malachi was written to priests — about the quality of what they brought. Peter just made you the priest. So Malachi’s rebuke now arrives at your door with no one standing in between.</a:t>
-            </a:r>
-            <a:endParaRPr lang="en-US" sz="1600" dirty="0"/>
+              <a:t>Malachi was written to priests → about the quality of what they brought. Peter just made you the priest. So Malachi’s rebuke now arrives at your door with no one standing in between.</a:t>
+            </a:r>
+            <a:endParaRPr lang="en-US" sz="2000" dirty="0"/>
           </a:p>
         </p:txBody>
       </p:sp>
@@ -3241,7 +3258,7 @@
         </p:nvSpPr>
         <p:spPr>
           <a:xfrm>
-            <a:off x="365760" y="3108960"/>
+            <a:off x="365760" y="3186683"/>
             <a:ext cx="8412480" cy="1417320"/>
           </a:xfrm>
           <a:prstGeom prst="rect">
@@ -3254,11 +3271,11 @@
           <a:bodyPr wrap="square" lIns="0" tIns="0" rIns="0" bIns="0" rtlCol="0" anchor="t"/>
           <a:lstStyle/>
           <a:p>
-            <a:pPr algn="l" indent="0" marL="0">
+            <a:pPr marL="0" indent="0" algn="l">
               <a:buNone/>
             </a:pPr>
             <a:r>
-              <a:rPr lang="en-US" sz="1500" b="1" i="1" dirty="0">
+              <a:rPr lang="en-US" b="1" i="1" dirty="0">
                 <a:solidFill>
                   <a:srgbClr val="000000"/>
                 </a:solidFill>
@@ -3268,11 +3285,25 @@
               </a:rPr>
               <a:t>“When you present blind animals for sacrifice, is that not wrong? … Try presenting them to your governor! Would he be pleased with you?” </a:t>
             </a:r>
-            <a:pPr algn="l" indent="0" marL="0">
+            <a:r>
+              <a:rPr lang="en-US" b="1" dirty="0">
+                <a:solidFill>
+                  <a:srgbClr val="000000"/>
+                </a:solidFill>
+                <a:latin typeface="Arial" pitchFamily="34" charset="0"/>
+                <a:ea typeface="Arial" pitchFamily="34" charset="-122"/>
+                <a:cs typeface="Arial" pitchFamily="34" charset="-120"/>
+              </a:rPr>
+              <a:t>(Malachi 1:8)</a:t>
+            </a:r>
+            <a:endParaRPr lang="en-US" sz="2000" dirty="0"/>
+          </a:p>
+          <a:p>
+            <a:pPr marL="0" indent="0" algn="l">
               <a:buNone/>
             </a:pPr>
             <a:r>
-              <a:rPr lang="en-US" sz="1400" b="1" dirty="0">
+              <a:rPr lang="en-US" sz="1600" dirty="0">
                 <a:solidFill>
                   <a:srgbClr val="000000"/>
                 </a:solidFill>
@@ -3280,29 +3311,9 @@
                 <a:ea typeface="Arial" pitchFamily="34" charset="-122"/>
                 <a:cs typeface="Arial" pitchFamily="34" charset="-120"/>
               </a:rPr>
-              <a:t>(Malachi 1:8)</a:t>
-            </a:r>
-            <a:pPr algn="l" indent="0" marL="0">
-              <a:buNone/>
-            </a:pPr>
-            <a:endParaRPr lang="en-US" sz="1600" dirty="0"/>
-          </a:p>
-          <a:p>
-            <a:pPr algn="l" indent="0" marL="0">
-              <a:buNone/>
-            </a:pPr>
-            <a:r>
-              <a:rPr lang="en-US" sz="1350" dirty="0">
-                <a:solidFill>
-                  <a:srgbClr val="000000"/>
-                </a:solidFill>
-                <a:latin typeface="Arial" pitchFamily="34" charset="0"/>
-                <a:ea typeface="Arial" pitchFamily="34" charset="-122"/>
-                <a:cs typeface="Arial" pitchFamily="34" charset="-120"/>
-              </a:rPr>
-              <a:t>God’s point: you would not hand your employer, your commanding officer, the leftover you hand Me. The blind, the lame, the leftover — offered because it cost you nothing.</a:t>
-            </a:r>
-            <a:endParaRPr lang="en-US" sz="1600" dirty="0"/>
+              <a:t>God’s point: you would not hand your employer, your commanding officer, the leftover you hand Me. The blind, the lame, the leftover → offered because it cost you nothing.</a:t>
+            </a:r>
+            <a:endParaRPr lang="en-US" sz="2000" dirty="0"/>
           </a:p>
         </p:txBody>
       </p:sp>
@@ -3314,8 +3325,8 @@
         </p:nvSpPr>
         <p:spPr>
           <a:xfrm>
-            <a:off x="365760" y="4663440"/>
-            <a:ext cx="8412480" cy="1463040"/>
+            <a:off x="365760" y="4828031"/>
+            <a:ext cx="8412480" cy="1703397"/>
           </a:xfrm>
           <a:prstGeom prst="rect">
             <a:avLst/>
@@ -3327,11 +3338,11 @@
           <a:bodyPr wrap="square" lIns="0" tIns="0" rIns="0" bIns="0" rtlCol="0" anchor="t"/>
           <a:lstStyle/>
           <a:p>
-            <a:pPr algn="l" indent="0" marL="0">
+            <a:pPr marL="0" indent="0" algn="l">
               <a:buNone/>
             </a:pPr>
             <a:r>
-              <a:rPr lang="en-US" sz="1400" b="1" dirty="0">
+              <a:rPr lang="en-US" b="1" dirty="0">
                 <a:solidFill>
                   <a:srgbClr val="1F497D"/>
                 </a:solidFill>
@@ -3339,14 +3350,39 @@
                 <a:ea typeface="Arial" pitchFamily="34" charset="-122"/>
                 <a:cs typeface="Arial" pitchFamily="34" charset="-120"/>
               </a:rPr>
-              <a:t>And the standard crossed every covenant untouched — the best, the whole, the unblemished:
+              <a:t>And the standard crossed every covenant untouched → the best, the whole, the unblemished:
 </a:t>
             </a:r>
-            <a:pPr algn="l" indent="0" marL="0">
+            <a:r>
+              <a:rPr lang="en-US" sz="2000" b="1" i="1" dirty="0">
+                <a:solidFill>
+                  <a:srgbClr val="000000"/>
+                </a:solidFill>
+                <a:latin typeface="Arial" pitchFamily="34" charset="0"/>
+                <a:ea typeface="Arial" pitchFamily="34" charset="-122"/>
+                <a:cs typeface="Arial" pitchFamily="34" charset="-120"/>
+              </a:rPr>
+              <a:t>“I will not offer to the LORD my God burnt sacrifices that cost me nothing.” </a:t>
+            </a:r>
+            <a:r>
+              <a:rPr lang="en-US" b="1" dirty="0">
+                <a:solidFill>
+                  <a:srgbClr val="000000"/>
+                </a:solidFill>
+                <a:latin typeface="Arial" pitchFamily="34" charset="0"/>
+                <a:ea typeface="Arial" pitchFamily="34" charset="-122"/>
+                <a:cs typeface="Arial" pitchFamily="34" charset="-120"/>
+              </a:rPr>
+              <a:t>(2 Samuel 24:24)</a:t>
+            </a:r>
+            <a:endParaRPr lang="en-US" sz="2000" dirty="0"/>
+          </a:p>
+          <a:p>
+            <a:pPr marL="0" indent="0" algn="l">
               <a:buNone/>
             </a:pPr>
             <a:r>
-              <a:rPr lang="en-US" sz="1600" b="1" i="1" dirty="0">
+              <a:rPr lang="en-US" sz="1600" dirty="0">
                 <a:solidFill>
                   <a:srgbClr val="000000"/>
                 </a:solidFill>
@@ -3354,43 +3390,9 @@
                 <a:ea typeface="Arial" pitchFamily="34" charset="-122"/>
                 <a:cs typeface="Arial" pitchFamily="34" charset="-120"/>
               </a:rPr>
-              <a:t>“I will not offer to the LORD my God burnt sacrifices that cost me nothing.” </a:t>
-            </a:r>
-            <a:pPr algn="l" indent="0" marL="0">
-              <a:buNone/>
-            </a:pPr>
-            <a:r>
-              <a:rPr lang="en-US" sz="1500" b="1" dirty="0">
-                <a:solidFill>
-                  <a:srgbClr val="000000"/>
-                </a:solidFill>
-                <a:latin typeface="Arial" pitchFamily="34" charset="0"/>
-                <a:ea typeface="Arial" pitchFamily="34" charset="-122"/>
-                <a:cs typeface="Arial" pitchFamily="34" charset="-120"/>
-              </a:rPr>
-              <a:t>(2 Samuel 24:24)</a:t>
-            </a:r>
-            <a:pPr algn="l" indent="0" marL="0">
-              <a:buNone/>
-            </a:pPr>
-            <a:endParaRPr lang="en-US" sz="1600" dirty="0"/>
-          </a:p>
-          <a:p>
-            <a:pPr algn="l" indent="0" marL="0">
-              <a:buNone/>
-            </a:pPr>
-            <a:r>
-              <a:rPr lang="en-US" sz="1350" dirty="0">
-                <a:solidFill>
-                  <a:srgbClr val="000000"/>
-                </a:solidFill>
-                <a:latin typeface="Arial" pitchFamily="34" charset="0"/>
-                <a:ea typeface="Arial" pitchFamily="34" charset="-122"/>
-                <a:cs typeface="Arial" pitchFamily="34" charset="-120"/>
-              </a:rPr>
               <a:t>David’s twelve words are the whole doctrine of cost. A sacrifice that costs nothing sacrifices nothing.</a:t>
             </a:r>
-            <a:endParaRPr lang="en-US" sz="1600" dirty="0"/>
+            <a:endParaRPr lang="en-US" sz="2000" dirty="0"/>
           </a:p>
         </p:txBody>
       </p:sp>
@@ -3408,26 +3410,26 @@
               <p:cTn id="2" dur="indefinite" nodeType="mainSeq">
                 <p:childTnLst>
                   <p:par>
-                    <p:cTn id="7" fill="hold">
+                    <p:cTn id="3" fill="hold">
                       <p:stCondLst>
                         <p:cond delay="indefinite"/>
                       </p:stCondLst>
                       <p:childTnLst>
                         <p:par>
-                          <p:cTn id="8" fill="hold">
+                          <p:cTn id="4" fill="hold">
                             <p:stCondLst>
                               <p:cond delay="0"/>
                             </p:stCondLst>
                             <p:childTnLst>
                               <p:par>
-                                <p:cTn id="3" presetID="42" presetClass="entr" presetSubtype="0" fill="hold" grpId="0" nodeType="clickEffect">
+                                <p:cTn id="5" presetID="42" presetClass="entr" presetSubtype="0" fill="hold" nodeType="clickEffect">
                                   <p:stCondLst>
                                     <p:cond delay="0"/>
                                   </p:stCondLst>
                                   <p:childTnLst>
                                     <p:set>
                                       <p:cBhvr>
-                                        <p:cTn id="4" dur="1" fill="hold">
+                                        <p:cTn id="6" dur="1" fill="hold">
                                           <p:stCondLst>
                                             <p:cond delay="0"/>
                                           </p:stCondLst>
@@ -3445,7 +3447,7 @@
                                     </p:set>
                                     <p:animEffect transition="in" filter="fade">
                                       <p:cBhvr>
-                                        <p:cTn id="5" dur="1000"/>
+                                        <p:cTn id="7" dur="1000"/>
                                         <p:tgtEl>
                                           <p:spTgt spid="4"/>
                                         </p:tgtEl>
@@ -3453,7 +3455,7 @@
                                     </p:animEffect>
                                     <p:anim calcmode="lin" valueType="num">
                                       <p:cBhvr>
-                                        <p:cTn id="6" dur="1000" fill="hold"/>
+                                        <p:cTn id="8" dur="1000" fill="hold"/>
                                         <p:tgtEl>
                                           <p:spTgt spid="4"/>
                                         </p:tgtEl>
@@ -3484,26 +3486,26 @@
                     </p:cTn>
                   </p:par>
                   <p:par>
-                    <p:cTn id="13" fill="hold">
+                    <p:cTn id="9" fill="hold">
                       <p:stCondLst>
                         <p:cond delay="indefinite"/>
                       </p:stCondLst>
                       <p:childTnLst>
                         <p:par>
-                          <p:cTn id="14" fill="hold">
+                          <p:cTn id="10" fill="hold">
                             <p:stCondLst>
                               <p:cond delay="0"/>
                             </p:stCondLst>
                             <p:childTnLst>
                               <p:par>
-                                <p:cTn id="9" presetID="42" presetClass="entr" presetSubtype="0" fill="hold" grpId="0" nodeType="clickEffect">
+                                <p:cTn id="11" presetID="42" presetClass="entr" presetSubtype="0" fill="hold" nodeType="clickEffect">
                                   <p:stCondLst>
                                     <p:cond delay="0"/>
                                   </p:stCondLst>
                                   <p:childTnLst>
                                     <p:set>
                                       <p:cBhvr>
-                                        <p:cTn id="10" dur="1" fill="hold">
+                                        <p:cTn id="12" dur="1" fill="hold">
                                           <p:stCondLst>
                                             <p:cond delay="0"/>
                                           </p:stCondLst>
@@ -3521,7 +3523,7 @@
                                     </p:set>
                                     <p:animEffect transition="in" filter="fade">
                                       <p:cBhvr>
-                                        <p:cTn id="11" dur="1000"/>
+                                        <p:cTn id="13" dur="1000"/>
                                         <p:tgtEl>
                                           <p:spTgt spid="5"/>
                                         </p:tgtEl>
@@ -3529,7 +3531,7 @@
                                     </p:animEffect>
                                     <p:anim calcmode="lin" valueType="num">
                                       <p:cBhvr>
-                                        <p:cTn id="12" dur="1000" fill="hold"/>
+                                        <p:cTn id="14" dur="1000" fill="hold"/>
                                         <p:tgtEl>
                                           <p:spTgt spid="5"/>
                                         </p:tgtEl>
@@ -3560,26 +3562,26 @@
                     </p:cTn>
                   </p:par>
                   <p:par>
-                    <p:cTn id="19" fill="hold">
+                    <p:cTn id="15" fill="hold">
                       <p:stCondLst>
                         <p:cond delay="indefinite"/>
                       </p:stCondLst>
                       <p:childTnLst>
                         <p:par>
-                          <p:cTn id="20" fill="hold">
+                          <p:cTn id="16" fill="hold">
                             <p:stCondLst>
                               <p:cond delay="0"/>
                             </p:stCondLst>
                             <p:childTnLst>
                               <p:par>
-                                <p:cTn id="15" presetID="42" presetClass="entr" presetSubtype="0" fill="hold" grpId="0" nodeType="clickEffect">
+                                <p:cTn id="17" presetID="42" presetClass="entr" presetSubtype="0" fill="hold" nodeType="clickEffect">
                                   <p:stCondLst>
                                     <p:cond delay="0"/>
                                   </p:stCondLst>
                                   <p:childTnLst>
                                     <p:set>
                                       <p:cBhvr>
-                                        <p:cTn id="16" dur="1" fill="hold">
+                                        <p:cTn id="18" dur="1" fill="hold">
                                           <p:stCondLst>
                                             <p:cond delay="0"/>
                                           </p:stCondLst>
@@ -3597,7 +3599,7 @@
                                     </p:set>
                                     <p:animEffect transition="in" filter="fade">
                                       <p:cBhvr>
-                                        <p:cTn id="17" dur="1000"/>
+                                        <p:cTn id="19" dur="1000"/>
                                         <p:tgtEl>
                                           <p:spTgt spid="6"/>
                                         </p:tgtEl>
@@ -3605,7 +3607,7 @@
                                     </p:animEffect>
                                     <p:anim calcmode="lin" valueType="num">
                                       <p:cBhvr>
-                                        <p:cTn id="18" dur="1000" fill="hold"/>
+                                        <p:cTn id="20" dur="1000" fill="hold"/>
                                         <p:tgtEl>
                                           <p:spTgt spid="6"/>
                                         </p:tgtEl>
@@ -3636,26 +3638,26 @@
                     </p:cTn>
                   </p:par>
                   <p:par>
-                    <p:cTn id="25" fill="hold">
+                    <p:cTn id="21" fill="hold">
                       <p:stCondLst>
                         <p:cond delay="indefinite"/>
                       </p:stCondLst>
                       <p:childTnLst>
                         <p:par>
-                          <p:cTn id="26" fill="hold">
+                          <p:cTn id="22" fill="hold">
                             <p:stCondLst>
                               <p:cond delay="0"/>
                             </p:stCondLst>
                             <p:childTnLst>
                               <p:par>
-                                <p:cTn id="21" presetID="42" presetClass="entr" presetSubtype="0" fill="hold" grpId="0" nodeType="clickEffect">
+                                <p:cTn id="23" presetID="42" presetClass="entr" presetSubtype="0" fill="hold" nodeType="clickEffect">
                                   <p:stCondLst>
                                     <p:cond delay="0"/>
                                   </p:stCondLst>
                                   <p:childTnLst>
                                     <p:set>
                                       <p:cBhvr>
-                                        <p:cTn id="22" dur="1" fill="hold">
+                                        <p:cTn id="24" dur="1" fill="hold">
                                           <p:stCondLst>
                                             <p:cond delay="0"/>
                                           </p:stCondLst>
@@ -3673,7 +3675,7 @@
                                     </p:set>
                                     <p:animEffect transition="in" filter="fade">
                                       <p:cBhvr>
-                                        <p:cTn id="23" dur="1000"/>
+                                        <p:cTn id="25" dur="1000"/>
                                         <p:tgtEl>
                                           <p:spTgt spid="7"/>
                                         </p:tgtEl>
@@ -3681,7 +3683,7 @@
                                     </p:animEffect>
                                     <p:anim calcmode="lin" valueType="num">
                                       <p:cBhvr>
-                                        <p:cTn id="24" dur="1000" fill="hold"/>
+                                        <p:cTn id="26" dur="1000" fill="hold"/>
                                         <p:tgtEl>
                                           <p:spTgt spid="7"/>
                                         </p:tgtEl>
@@ -3774,7 +3776,7 @@
           <a:bodyPr wrap="square" lIns="0" tIns="0" rIns="0" bIns="0" rtlCol="0" anchor="t"/>
           <a:lstStyle/>
           <a:p>
-            <a:pPr algn="l" indent="0" marL="0">
+            <a:pPr marL="0" indent="0" algn="l">
               <a:buNone/>
             </a:pPr>
             <a:r>
@@ -3813,11 +3815,11 @@
           <a:bodyPr wrap="square" lIns="0" tIns="0" rIns="0" bIns="0" rtlCol="0" anchor="t"/>
           <a:lstStyle/>
           <a:p>
-            <a:pPr algn="l" indent="0" marL="0">
+            <a:pPr marL="0" indent="0" algn="l">
               <a:buNone/>
             </a:pPr>
             <a:r>
-              <a:rPr lang="en-US" sz="1300" b="1" dirty="0">
+              <a:rPr lang="en-US" sz="2000" b="1" dirty="0">
                 <a:solidFill>
                   <a:srgbClr val="4F81BD"/>
                 </a:solidFill>
@@ -3825,9 +3827,9 @@
                 <a:ea typeface="Arial" pitchFamily="34" charset="-122"/>
                 <a:cs typeface="Arial" pitchFamily="34" charset="-120"/>
               </a:rPr>
-              <a:t>Romans 12:1–2 is Hebrews 5:14 — one paragraph</a:t>
-            </a:r>
-            <a:endParaRPr lang="en-US" sz="1600" dirty="0"/>
+              <a:t>Romans 12:1–2 is Hebrews 5:14 → one paragraph</a:t>
+            </a:r>
+            <a:endParaRPr lang="en-US" sz="2800" dirty="0"/>
           </a:p>
         </p:txBody>
       </p:sp>
@@ -3840,7 +3842,7 @@
         <p:spPr>
           <a:xfrm>
             <a:off x="365760" y="1143000"/>
-            <a:ext cx="8412480" cy="1234440"/>
+            <a:ext cx="8412480" cy="1168121"/>
           </a:xfrm>
           <a:prstGeom prst="rect">
             <a:avLst/>
@@ -3852,11 +3854,11 @@
           <a:bodyPr wrap="square" lIns="0" tIns="0" rIns="0" bIns="0" rtlCol="0" anchor="t"/>
           <a:lstStyle/>
           <a:p>
-            <a:pPr algn="l" indent="0" marL="0">
+            <a:pPr marL="0" indent="0" algn="l">
               <a:buNone/>
             </a:pPr>
             <a:r>
-              <a:rPr lang="en-US" sz="1500" b="1" i="1" dirty="0">
+              <a:rPr lang="en-US" b="1" i="1" dirty="0">
                 <a:solidFill>
                   <a:srgbClr val="000000"/>
                 </a:solidFill>
@@ -3864,13 +3866,10 @@
                 <a:ea typeface="Arial" pitchFamily="34" charset="-122"/>
                 <a:cs typeface="Arial" pitchFamily="34" charset="-120"/>
               </a:rPr>
-              <a:t>“present your bodies as a sacrifice… (2) Do not be conformed to this present world, but be transformed by the renewing of your mind, so that you may test and approve what is the will of God — what is good and well-pleasing and perfect.” </a:t>
-            </a:r>
-            <a:pPr algn="l" indent="0" marL="0">
-              <a:buNone/>
-            </a:pPr>
-            <a:r>
-              <a:rPr lang="en-US" sz="1400" b="1" dirty="0">
+              <a:t>“present your bodies as a sacrifice… (2) Do not be conformed to this present world, but be transformed by the renewing of your mind, so that you may test and approve what is the will of God → what is good and well-pleasing and perfect.” </a:t>
+            </a:r>
+            <a:r>
+              <a:rPr lang="en-US" b="1" dirty="0">
                 <a:solidFill>
                   <a:srgbClr val="000000"/>
                 </a:solidFill>
@@ -3880,7 +3879,7 @@
               </a:rPr>
               <a:t>(Romans 12:1–2)</a:t>
             </a:r>
-            <a:endParaRPr lang="en-US" sz="1600" dirty="0"/>
+            <a:endParaRPr lang="en-US" sz="2000" dirty="0"/>
           </a:p>
         </p:txBody>
       </p:sp>
@@ -3892,8 +3891,8 @@
         </p:nvSpPr>
         <p:spPr>
           <a:xfrm>
-            <a:off x="365760" y="2514600"/>
-            <a:ext cx="8412480" cy="868680"/>
+            <a:off x="365760" y="2515940"/>
+            <a:ext cx="8412480" cy="640582"/>
           </a:xfrm>
           <a:prstGeom prst="rect">
             <a:avLst/>
@@ -3905,11 +3904,11 @@
           <a:bodyPr wrap="square" lIns="0" tIns="0" rIns="0" bIns="0" rtlCol="0" anchor="t"/>
           <a:lstStyle/>
           <a:p>
-            <a:pPr algn="l" indent="0" marL="0">
+            <a:pPr marL="0" indent="0" algn="l">
               <a:buNone/>
             </a:pPr>
             <a:r>
-              <a:rPr lang="en-US" sz="1500" b="1" dirty="0">
+              <a:rPr lang="en-US" b="1" dirty="0">
                 <a:solidFill>
                   <a:srgbClr val="1F497D"/>
                 </a:solidFill>
@@ -3919,11 +3918,8 @@
               </a:rPr>
               <a:t>Verse 1 puts the body on the altar. Verse 2 puts the mind. </a:t>
             </a:r>
-            <a:pPr algn="l" indent="0" marL="0">
-              <a:buNone/>
-            </a:pPr>
-            <a:r>
-              <a:rPr lang="en-US" sz="1450" dirty="0">
+            <a:r>
+              <a:rPr lang="en-US" dirty="0">
                 <a:solidFill>
                   <a:srgbClr val="000000"/>
                 </a:solidFill>
@@ -3933,7 +3929,7 @@
               </a:rPr>
               <a:t>And look WHY the mind is renewed: “so that you may test and approve… what is good.”</a:t>
             </a:r>
-            <a:endParaRPr lang="en-US" sz="1600" dirty="0"/>
+            <a:endParaRPr lang="en-US" sz="2000" dirty="0"/>
           </a:p>
         </p:txBody>
       </p:sp>
@@ -3945,7 +3941,7 @@
         </p:nvSpPr>
         <p:spPr>
           <a:xfrm>
-            <a:off x="365760" y="3474720"/>
+            <a:off x="365760" y="3361341"/>
             <a:ext cx="8412480" cy="1143000"/>
           </a:xfrm>
           <a:prstGeom prst="rect">
@@ -3958,11 +3954,11 @@
           <a:bodyPr wrap="square" lIns="0" tIns="0" rIns="0" bIns="0" rtlCol="0" anchor="t"/>
           <a:lstStyle/>
           <a:p>
-            <a:pPr algn="l" indent="0" marL="0">
+            <a:pPr marL="0" indent="0" algn="l">
               <a:buNone/>
             </a:pPr>
             <a:r>
-              <a:rPr lang="en-US" sz="1500" b="1" dirty="0">
+              <a:rPr lang="en-US" b="1" dirty="0">
                 <a:solidFill>
                   <a:srgbClr val="1F497D"/>
                 </a:solidFill>
@@ -3972,11 +3968,8 @@
               </a:rPr>
               <a:t>That is Hebrews 5:14 in Paul’s handwriting. </a:t>
             </a:r>
-            <a:pPr algn="l" indent="0" marL="0">
-              <a:buNone/>
-            </a:pPr>
-            <a:r>
-              <a:rPr lang="en-US" sz="1450" dirty="0">
+            <a:r>
+              <a:rPr lang="en-US" dirty="0">
                 <a:solidFill>
                   <a:srgbClr val="000000"/>
                 </a:solidFill>
@@ -3984,9 +3977,9 @@
                 <a:ea typeface="Arial" pitchFamily="34" charset="-122"/>
                 <a:cs typeface="Arial" pitchFamily="34" charset="-120"/>
               </a:rPr>
-              <a:t>The renewed mind exists to discern the Good — the exact faculty the whole course has been training (Week 5). The living sacrifice and trained discernment are not two subjects. They are verses one and two of the same paragraph.</a:t>
-            </a:r>
-            <a:endParaRPr lang="en-US" sz="1600" dirty="0"/>
+              <a:t>The renewed mind exists to discern the Good → the exact faculty the whole course has been training (Week 5). The living sacrifice and trained discernment are not two subjects. They are verses one and two of the same paragraph.</a:t>
+            </a:r>
+            <a:endParaRPr lang="en-US" sz="2000" dirty="0"/>
           </a:p>
         </p:txBody>
       </p:sp>
@@ -3999,7 +3992,7 @@
         <p:spPr>
           <a:xfrm>
             <a:off x="365760" y="4709160"/>
-            <a:ext cx="8412480" cy="960120"/>
+            <a:ext cx="8412480" cy="897820"/>
           </a:xfrm>
           <a:prstGeom prst="rect">
             <a:avLst/>
@@ -4011,11 +4004,11 @@
           <a:bodyPr wrap="square" lIns="0" tIns="0" rIns="0" bIns="0" rtlCol="0" anchor="t"/>
           <a:lstStyle/>
           <a:p>
-            <a:pPr algn="l" indent="0" marL="0">
+            <a:pPr marL="0" indent="0" algn="l">
               <a:buNone/>
             </a:pPr>
             <a:r>
-              <a:rPr lang="en-US" sz="1500" b="1" dirty="0">
+              <a:rPr lang="en-US" b="1" dirty="0">
                 <a:solidFill>
                   <a:srgbClr val="1F497D"/>
                 </a:solidFill>
@@ -4025,11 +4018,8 @@
               </a:rPr>
               <a:t>So daily renewal in the Word is not preparation for your sacrifice. </a:t>
             </a:r>
-            <a:pPr algn="l" indent="0" marL="0">
-              <a:buNone/>
-            </a:pPr>
-            <a:r>
-              <a:rPr lang="en-US" sz="1450" dirty="0">
+            <a:r>
+              <a:rPr lang="en-US" dirty="0">
                 <a:solidFill>
                   <a:srgbClr val="000000"/>
                 </a:solidFill>
@@ -4037,9 +4027,9 @@
                 <a:ea typeface="Arial" pitchFamily="34" charset="-122"/>
                 <a:cs typeface="Arial" pitchFamily="34" charset="-120"/>
               </a:rPr>
-              <a:t>It IS your sacrifice — the daily portion of it. The mind laid on the altar every morning is the offering, not the warm-up.</a:t>
-            </a:r>
-            <a:endParaRPr lang="en-US" sz="1600" dirty="0"/>
+              <a:t>It IS your sacrifice → the daily portion of it. The mind laid on the altar every morning is the offering, not the warm-up.</a:t>
+            </a:r>
+            <a:endParaRPr lang="en-US" sz="2000" dirty="0"/>
           </a:p>
         </p:txBody>
       </p:sp>
@@ -4064,6 +4054,13 @@
           </a:solidFill>
           <a:ln/>
         </p:spPr>
+        <p:txBody>
+          <a:bodyPr/>
+          <a:lstStyle/>
+          <a:p>
+            <a:endParaRPr lang="en-US"/>
+          </a:p>
+        </p:txBody>
       </p:sp>
       <p:sp>
         <p:nvSpPr>
@@ -4086,7 +4083,7 @@
           <a:bodyPr wrap="square" lIns="0" tIns="0" rIns="0" bIns="0" rtlCol="0" anchor="ctr"/>
           <a:lstStyle/>
           <a:p>
-            <a:pPr algn="ctr" indent="0" marL="0">
+            <a:pPr marL="0" indent="0" algn="ctr">
               <a:buNone/>
             </a:pPr>
             <a:r>
@@ -4098,7 +4095,29 @@
                 <a:ea typeface="Arial" pitchFamily="34" charset="-122"/>
                 <a:cs typeface="Arial" pitchFamily="34" charset="-120"/>
               </a:rPr>
-              <a:t>Mercy first, altar second — a thank offering, not a payment.</a:t>
+              <a:t>Mercy first, altar second </a:t>
+            </a:r>
+            <a:r>
+              <a:rPr lang="en-US" sz="1800" b="1">
+                <a:solidFill>
+                  <a:srgbClr val="FFFFFF"/>
+                </a:solidFill>
+                <a:latin typeface="Arial" pitchFamily="34" charset="0"/>
+                <a:ea typeface="Arial" pitchFamily="34" charset="-122"/>
+                <a:cs typeface="Arial" pitchFamily="34" charset="-120"/>
+              </a:rPr>
+              <a:t>→</a:t>
+            </a:r>
+            <a:r>
+              <a:rPr lang="en-US" sz="1800" b="1" dirty="0">
+                <a:solidFill>
+                  <a:srgbClr val="FFFFFF"/>
+                </a:solidFill>
+                <a:latin typeface="Arial" pitchFamily="34" charset="0"/>
+                <a:ea typeface="Arial" pitchFamily="34" charset="-122"/>
+                <a:cs typeface="Arial" pitchFamily="34" charset="-120"/>
+              </a:rPr>
+              <a:t> a thank offering, not a payment.</a:t>
             </a:r>
             <a:endParaRPr lang="en-US" sz="1600" dirty="0"/>
           </a:p>
@@ -4118,26 +4137,26 @@
               <p:cTn id="2" dur="indefinite" nodeType="mainSeq">
                 <p:childTnLst>
                   <p:par>
-                    <p:cTn id="7" fill="hold">
+                    <p:cTn id="3" fill="hold">
                       <p:stCondLst>
                         <p:cond delay="indefinite"/>
                       </p:stCondLst>
                       <p:childTnLst>
                         <p:par>
-                          <p:cTn id="8" fill="hold">
+                          <p:cTn id="4" fill="hold">
                             <p:stCondLst>
                               <p:cond delay="0"/>
                             </p:stCondLst>
                             <p:childTnLst>
                               <p:par>
-                                <p:cTn id="3" presetID="42" presetClass="entr" presetSubtype="0" fill="hold" grpId="0" nodeType="clickEffect">
+                                <p:cTn id="5" presetID="42" presetClass="entr" presetSubtype="0" fill="hold" nodeType="clickEffect">
                                   <p:stCondLst>
                                     <p:cond delay="0"/>
                                   </p:stCondLst>
                                   <p:childTnLst>
                                     <p:set>
                                       <p:cBhvr>
-                                        <p:cTn id="4" dur="1" fill="hold">
+                                        <p:cTn id="6" dur="1" fill="hold">
                                           <p:stCondLst>
                                             <p:cond delay="0"/>
                                           </p:stCondLst>
@@ -4155,7 +4174,7 @@
                                     </p:set>
                                     <p:animEffect transition="in" filter="fade">
                                       <p:cBhvr>
-                                        <p:cTn id="5" dur="1000"/>
+                                        <p:cTn id="7" dur="1000"/>
                                         <p:tgtEl>
                                           <p:spTgt spid="4"/>
                                         </p:tgtEl>
@@ -4163,7 +4182,7 @@
                                     </p:animEffect>
                                     <p:anim calcmode="lin" valueType="num">
                                       <p:cBhvr>
-                                        <p:cTn id="6" dur="1000" fill="hold"/>
+                                        <p:cTn id="8" dur="1000" fill="hold"/>
                                         <p:tgtEl>
                                           <p:spTgt spid="4"/>
                                         </p:tgtEl>
@@ -4194,26 +4213,26 @@
                     </p:cTn>
                   </p:par>
                   <p:par>
-                    <p:cTn id="13" fill="hold">
+                    <p:cTn id="9" fill="hold">
                       <p:stCondLst>
                         <p:cond delay="indefinite"/>
                       </p:stCondLst>
                       <p:childTnLst>
                         <p:par>
-                          <p:cTn id="14" fill="hold">
+                          <p:cTn id="10" fill="hold">
                             <p:stCondLst>
                               <p:cond delay="0"/>
                             </p:stCondLst>
                             <p:childTnLst>
                               <p:par>
-                                <p:cTn id="9" presetID="42" presetClass="entr" presetSubtype="0" fill="hold" grpId="0" nodeType="clickEffect">
+                                <p:cTn id="11" presetID="42" presetClass="entr" presetSubtype="0" fill="hold" nodeType="clickEffect">
                                   <p:stCondLst>
                                     <p:cond delay="0"/>
                                   </p:stCondLst>
                                   <p:childTnLst>
                                     <p:set>
                                       <p:cBhvr>
-                                        <p:cTn id="10" dur="1" fill="hold">
+                                        <p:cTn id="12" dur="1" fill="hold">
                                           <p:stCondLst>
                                             <p:cond delay="0"/>
                                           </p:stCondLst>
@@ -4231,7 +4250,7 @@
                                     </p:set>
                                     <p:animEffect transition="in" filter="fade">
                                       <p:cBhvr>
-                                        <p:cTn id="11" dur="1000"/>
+                                        <p:cTn id="13" dur="1000"/>
                                         <p:tgtEl>
                                           <p:spTgt spid="5"/>
                                         </p:tgtEl>
@@ -4239,7 +4258,7 @@
                                     </p:animEffect>
                                     <p:anim calcmode="lin" valueType="num">
                                       <p:cBhvr>
-                                        <p:cTn id="12" dur="1000" fill="hold"/>
+                                        <p:cTn id="14" dur="1000" fill="hold"/>
                                         <p:tgtEl>
                                           <p:spTgt spid="5"/>
                                         </p:tgtEl>
@@ -4270,26 +4289,26 @@
                     </p:cTn>
                   </p:par>
                   <p:par>
-                    <p:cTn id="19" fill="hold">
+                    <p:cTn id="15" fill="hold">
                       <p:stCondLst>
                         <p:cond delay="indefinite"/>
                       </p:stCondLst>
                       <p:childTnLst>
                         <p:par>
-                          <p:cTn id="20" fill="hold">
+                          <p:cTn id="16" fill="hold">
                             <p:stCondLst>
                               <p:cond delay="0"/>
                             </p:stCondLst>
                             <p:childTnLst>
                               <p:par>
-                                <p:cTn id="15" presetID="42" presetClass="entr" presetSubtype="0" fill="hold" grpId="0" nodeType="clickEffect">
+                                <p:cTn id="17" presetID="42" presetClass="entr" presetSubtype="0" fill="hold" nodeType="clickEffect">
                                   <p:stCondLst>
                                     <p:cond delay="0"/>
                                   </p:stCondLst>
                                   <p:childTnLst>
                                     <p:set>
                                       <p:cBhvr>
-                                        <p:cTn id="16" dur="1" fill="hold">
+                                        <p:cTn id="18" dur="1" fill="hold">
                                           <p:stCondLst>
                                             <p:cond delay="0"/>
                                           </p:stCondLst>
@@ -4307,7 +4326,7 @@
                                     </p:set>
                                     <p:animEffect transition="in" filter="fade">
                                       <p:cBhvr>
-                                        <p:cTn id="17" dur="1000"/>
+                                        <p:cTn id="19" dur="1000"/>
                                         <p:tgtEl>
                                           <p:spTgt spid="6"/>
                                         </p:tgtEl>
@@ -4315,7 +4334,7 @@
                                     </p:animEffect>
                                     <p:anim calcmode="lin" valueType="num">
                                       <p:cBhvr>
-                                        <p:cTn id="18" dur="1000" fill="hold"/>
+                                        <p:cTn id="20" dur="1000" fill="hold"/>
                                         <p:tgtEl>
                                           <p:spTgt spid="6"/>
                                         </p:tgtEl>
@@ -4346,26 +4365,26 @@
                     </p:cTn>
                   </p:par>
                   <p:par>
-                    <p:cTn id="25" fill="hold">
+                    <p:cTn id="21" fill="hold">
                       <p:stCondLst>
                         <p:cond delay="indefinite"/>
                       </p:stCondLst>
                       <p:childTnLst>
                         <p:par>
-                          <p:cTn id="26" fill="hold">
+                          <p:cTn id="22" fill="hold">
                             <p:stCondLst>
                               <p:cond delay="0"/>
                             </p:stCondLst>
                             <p:childTnLst>
                               <p:par>
-                                <p:cTn id="21" presetID="42" presetClass="entr" presetSubtype="0" fill="hold" grpId="0" nodeType="clickEffect">
+                                <p:cTn id="23" presetID="42" presetClass="entr" presetSubtype="0" fill="hold" nodeType="clickEffect">
                                   <p:stCondLst>
                                     <p:cond delay="0"/>
                                   </p:stCondLst>
                                   <p:childTnLst>
                                     <p:set>
                                       <p:cBhvr>
-                                        <p:cTn id="22" dur="1" fill="hold">
+                                        <p:cTn id="24" dur="1" fill="hold">
                                           <p:stCondLst>
                                             <p:cond delay="0"/>
                                           </p:stCondLst>
@@ -4383,7 +4402,7 @@
                                     </p:set>
                                     <p:animEffect transition="in" filter="fade">
                                       <p:cBhvr>
-                                        <p:cTn id="23" dur="1000"/>
+                                        <p:cTn id="25" dur="1000"/>
                                         <p:tgtEl>
                                           <p:spTgt spid="7"/>
                                         </p:tgtEl>
@@ -4391,7 +4410,7 @@
                                     </p:animEffect>
                                     <p:anim calcmode="lin" valueType="num">
                                       <p:cBhvr>
-                                        <p:cTn id="24" dur="1000" fill="hold"/>
+                                        <p:cTn id="26" dur="1000" fill="hold"/>
                                         <p:tgtEl>
                                           <p:spTgt spid="7"/>
                                         </p:tgtEl>
@@ -4422,26 +4441,26 @@
                     </p:cTn>
                   </p:par>
                   <p:par>
-                    <p:cTn id="35" fill="hold">
+                    <p:cTn id="27" fill="hold">
                       <p:stCondLst>
                         <p:cond delay="indefinite"/>
                       </p:stCondLst>
                       <p:childTnLst>
                         <p:par>
-                          <p:cTn id="36" fill="hold">
+                          <p:cTn id="28" fill="hold">
                             <p:stCondLst>
                               <p:cond delay="0"/>
                             </p:stCondLst>
                             <p:childTnLst>
                               <p:par>
-                                <p:cTn id="27" presetID="42" presetClass="entr" presetSubtype="0" fill="hold" grpId="0" nodeType="clickEffect">
+                                <p:cTn id="29" presetID="42" presetClass="entr" presetSubtype="0" fill="hold" nodeType="clickEffect">
                                   <p:stCondLst>
                                     <p:cond delay="0"/>
                                   </p:stCondLst>
                                   <p:childTnLst>
                                     <p:set>
                                       <p:cBhvr>
-                                        <p:cTn id="28" dur="1" fill="hold">
+                                        <p:cTn id="30" dur="1" fill="hold">
                                           <p:stCondLst>
                                             <p:cond delay="0"/>
                                           </p:stCondLst>
@@ -4459,7 +4478,7 @@
                                     </p:set>
                                     <p:animEffect transition="in" filter="fade">
                                       <p:cBhvr>
-                                        <p:cTn id="29" dur="1000"/>
+                                        <p:cTn id="31" dur="1000"/>
                                         <p:tgtEl>
                                           <p:spTgt spid="8"/>
                                         </p:tgtEl>
@@ -4467,7 +4486,7 @@
                                     </p:animEffect>
                                     <p:anim calcmode="lin" valueType="num">
                                       <p:cBhvr>
-                                        <p:cTn id="30" dur="1000" fill="hold"/>
+                                        <p:cTn id="32" dur="1000" fill="hold"/>
                                         <p:tgtEl>
                                           <p:spTgt spid="8"/>
                                         </p:tgtEl>
@@ -4492,14 +4511,14 @@
                                 </p:cTn>
                               </p:par>
                               <p:par>
-                                <p:cTn id="31" presetID="42" presetClass="entr" presetSubtype="0" fill="hold" grpId="0" nodeType="withEffect">
+                                <p:cTn id="33" presetID="42" presetClass="entr" presetSubtype="0" fill="hold" nodeType="withEffect">
                                   <p:stCondLst>
                                     <p:cond delay="0"/>
                                   </p:stCondLst>
                                   <p:childTnLst>
                                     <p:set>
                                       <p:cBhvr>
-                                        <p:cTn id="32" dur="1" fill="hold">
+                                        <p:cTn id="34" dur="1" fill="hold">
                                           <p:stCondLst>
                                             <p:cond delay="0"/>
                                           </p:stCondLst>
@@ -4517,7 +4536,7 @@
                                     </p:set>
                                     <p:animEffect transition="in" filter="fade">
                                       <p:cBhvr>
-                                        <p:cTn id="33" dur="1000"/>
+                                        <p:cTn id="35" dur="1000"/>
                                         <p:tgtEl>
                                           <p:spTgt spid="9"/>
                                         </p:tgtEl>
@@ -4525,7 +4544,7 @@
                                     </p:animEffect>
                                     <p:anim calcmode="lin" valueType="num">
                                       <p:cBhvr>
-                                        <p:cTn id="34" dur="1000" fill="hold"/>
+                                        <p:cTn id="36" dur="1000" fill="hold"/>
                                         <p:tgtEl>
                                           <p:spTgt spid="9"/>
                                         </p:tgtEl>
@@ -4618,7 +4637,7 @@
           <a:bodyPr wrap="square" lIns="0" tIns="0" rIns="0" bIns="0" rtlCol="0" anchor="t"/>
           <a:lstStyle/>
           <a:p>
-            <a:pPr algn="l" indent="0" marL="0">
+            <a:pPr marL="0" indent="0" algn="l">
               <a:buNone/>
             </a:pPr>
             <a:r>
@@ -4657,11 +4676,11 @@
           <a:bodyPr wrap="square" lIns="0" tIns="0" rIns="0" bIns="0" rtlCol="0" anchor="t"/>
           <a:lstStyle/>
           <a:p>
-            <a:pPr algn="l" indent="0" marL="0">
+            <a:pPr marL="0" indent="0" algn="l">
               <a:buNone/>
             </a:pPr>
             <a:r>
-              <a:rPr lang="en-US" sz="1300" b="1" dirty="0">
+              <a:rPr lang="en-US" sz="2000" b="1" dirty="0">
                 <a:solidFill>
                   <a:srgbClr val="4F81BD"/>
                 </a:solidFill>
@@ -4669,9 +4688,9 @@
                 <a:ea typeface="Arial" pitchFamily="34" charset="-122"/>
                 <a:cs typeface="Arial" pitchFamily="34" charset="-120"/>
               </a:rPr>
-              <a:t>Ten minutes — this is the week’s practice</a:t>
-            </a:r>
-            <a:endParaRPr lang="en-US" sz="1600" dirty="0"/>
+              <a:t>Ten minutes → this is the week’s practice</a:t>
+            </a:r>
+            <a:endParaRPr lang="en-US" sz="2800" dirty="0"/>
           </a:p>
         </p:txBody>
       </p:sp>
@@ -4696,11 +4715,11 @@
           <a:bodyPr wrap="square" lIns="0" tIns="0" rIns="0" bIns="0" rtlCol="0" anchor="t"/>
           <a:lstStyle/>
           <a:p>
-            <a:pPr algn="l" indent="0" marL="0">
+            <a:pPr marL="0" indent="0" algn="l">
               <a:buNone/>
             </a:pPr>
             <a:r>
-              <a:rPr lang="en-US" sz="2000" b="1" dirty="0">
+              <a:rPr lang="en-US" sz="2800" b="1" dirty="0">
                 <a:solidFill>
                   <a:srgbClr val="1F497D"/>
                 </a:solidFill>
@@ -4710,11 +4729,8 @@
               </a:rPr>
               <a:t>1.  </a:t>
             </a:r>
-            <a:pPr algn="l" indent="0" marL="0">
-              <a:buNone/>
-            </a:pPr>
-            <a:r>
-              <a:rPr lang="en-US" sz="1800" dirty="0">
+            <a:r>
+              <a:rPr lang="en-US" sz="2400" dirty="0">
                 <a:solidFill>
                   <a:srgbClr val="000000"/>
                 </a:solidFill>
@@ -4722,9 +4738,9 @@
                 <a:ea typeface="Arial" pitchFamily="34" charset="-122"/>
                 <a:cs typeface="Arial" pitchFamily="34" charset="-120"/>
               </a:rPr>
-              <a:t>If your time this week were an animal brought to Malachi’s altar, what condition would it be in — the best of the flock, or the blind and lame?</a:t>
-            </a:r>
-            <a:endParaRPr lang="en-US" sz="1600" dirty="0"/>
+              <a:t>If your time this week were an animal brought to Malachi’s altar, what condition would it be in → the best of the flock, or the blind and lame?</a:t>
+            </a:r>
+            <a:endParaRPr lang="en-US" sz="2000" dirty="0"/>
           </a:p>
         </p:txBody>
       </p:sp>
@@ -4749,11 +4765,11 @@
           <a:bodyPr wrap="square" lIns="0" tIns="0" rIns="0" bIns="0" rtlCol="0" anchor="t"/>
           <a:lstStyle/>
           <a:p>
-            <a:pPr algn="l" indent="0" marL="0">
+            <a:pPr marL="0" indent="0" algn="l">
               <a:buNone/>
             </a:pPr>
             <a:r>
-              <a:rPr lang="en-US" sz="2000" b="1" dirty="0">
+              <a:rPr lang="en-US" sz="2800" b="1" dirty="0">
                 <a:solidFill>
                   <a:srgbClr val="1F497D"/>
                 </a:solidFill>
@@ -4763,11 +4779,8 @@
               </a:rPr>
               <a:t>2.  </a:t>
             </a:r>
-            <a:pPr algn="l" indent="0" marL="0">
-              <a:buNone/>
-            </a:pPr>
-            <a:r>
-              <a:rPr lang="en-US" sz="1800" dirty="0">
+            <a:r>
+              <a:rPr lang="en-US" sz="2400" dirty="0">
                 <a:solidFill>
                   <a:srgbClr val="000000"/>
                 </a:solidFill>
@@ -4777,7 +4790,7 @@
               </a:rPr>
               <a:t>What are the “first minutes” of your day currently given to? What would change if they went on the altar?</a:t>
             </a:r>
-            <a:endParaRPr lang="en-US" sz="1600" dirty="0"/>
+            <a:endParaRPr lang="en-US" sz="2000" dirty="0"/>
           </a:p>
         </p:txBody>
       </p:sp>
@@ -4802,11 +4815,22 @@
           <a:bodyPr wrap="square" lIns="0" tIns="0" rIns="0" bIns="0" rtlCol="0" anchor="t"/>
           <a:lstStyle/>
           <a:p>
-            <a:pPr algn="l" indent="0" marL="0">
+            <a:pPr marL="0" indent="0" algn="l">
               <a:buNone/>
             </a:pPr>
             <a:r>
-              <a:rPr lang="en-US" sz="1400" b="1" dirty="0">
+              <a:rPr lang="en-US" sz="2000" i="1" dirty="0">
+                <a:solidFill>
+                  <a:srgbClr val="000000"/>
+                </a:solidFill>
+                <a:latin typeface="Arial" pitchFamily="34" charset="0"/>
+                <a:ea typeface="Arial" pitchFamily="34" charset="-122"/>
+                <a:cs typeface="Arial" pitchFamily="34" charset="-120"/>
+              </a:rPr>
+              <a:t>This</a:t>
+            </a:r>
+            <a:r>
+              <a:rPr lang="en-US" sz="2000" b="1" dirty="0">
                 <a:solidFill>
                   <a:srgbClr val="1F497D"/>
                 </a:solidFill>
@@ -4814,13 +4838,10 @@
                 <a:ea typeface="Arial" pitchFamily="34" charset="-122"/>
                 <a:cs typeface="Arial" pitchFamily="34" charset="-120"/>
               </a:rPr>
-              <a:t>Gentle, first-person: </a:t>
-            </a:r>
-            <a:pPr algn="l" indent="0" marL="0">
-              <a:buNone/>
-            </a:pPr>
-            <a:r>
-              <a:rPr lang="en-US" sz="1400" i="1" dirty="0">
+              <a:t> </a:t>
+            </a:r>
+            <a:r>
+              <a:rPr lang="en-US" sz="2000" i="1" dirty="0">
                 <a:solidFill>
                   <a:srgbClr val="000000"/>
                 </a:solidFill>
@@ -4828,9 +4849,9 @@
                 <a:ea typeface="Arial" pitchFamily="34" charset="-122"/>
                 <a:cs typeface="Arial" pitchFamily="34" charset="-120"/>
               </a:rPr>
-              <a:t>this is a mirror, not a measuring stick — grace already holds you; the question is what you’re bringing in return.</a:t>
-            </a:r>
-            <a:endParaRPr lang="en-US" sz="1600" dirty="0"/>
+              <a:t>is a mirror, not a measuring stick → grace already holds you; the question is what you’re bringing in return.</a:t>
+            </a:r>
+            <a:endParaRPr lang="en-US" sz="2400" dirty="0"/>
           </a:p>
         </p:txBody>
       </p:sp>
@@ -4848,26 +4869,26 @@
               <p:cTn id="2" dur="indefinite" nodeType="mainSeq">
                 <p:childTnLst>
                   <p:par>
-                    <p:cTn id="7" fill="hold">
+                    <p:cTn id="3" fill="hold">
                       <p:stCondLst>
                         <p:cond delay="indefinite"/>
                       </p:stCondLst>
                       <p:childTnLst>
                         <p:par>
-                          <p:cTn id="8" fill="hold">
+                          <p:cTn id="4" fill="hold">
                             <p:stCondLst>
                               <p:cond delay="0"/>
                             </p:stCondLst>
                             <p:childTnLst>
                               <p:par>
-                                <p:cTn id="3" presetID="42" presetClass="entr" presetSubtype="0" fill="hold" grpId="0" nodeType="clickEffect">
+                                <p:cTn id="5" presetID="42" presetClass="entr" presetSubtype="0" fill="hold" nodeType="clickEffect">
                                   <p:stCondLst>
                                     <p:cond delay="0"/>
                                   </p:stCondLst>
                                   <p:childTnLst>
                                     <p:set>
                                       <p:cBhvr>
-                                        <p:cTn id="4" dur="1" fill="hold">
+                                        <p:cTn id="6" dur="1" fill="hold">
                                           <p:stCondLst>
                                             <p:cond delay="0"/>
                                           </p:stCondLst>
@@ -4885,7 +4906,7 @@
                                     </p:set>
                                     <p:animEffect transition="in" filter="fade">
                                       <p:cBhvr>
-                                        <p:cTn id="5" dur="1000"/>
+                                        <p:cTn id="7" dur="1000"/>
                                         <p:tgtEl>
                                           <p:spTgt spid="4"/>
                                         </p:tgtEl>
@@ -4893,7 +4914,7 @@
                                     </p:animEffect>
                                     <p:anim calcmode="lin" valueType="num">
                                       <p:cBhvr>
-                                        <p:cTn id="6" dur="1000" fill="hold"/>
+                                        <p:cTn id="8" dur="1000" fill="hold"/>
                                         <p:tgtEl>
                                           <p:spTgt spid="4"/>
                                         </p:tgtEl>
@@ -4924,26 +4945,26 @@
                     </p:cTn>
                   </p:par>
                   <p:par>
-                    <p:cTn id="13" fill="hold">
+                    <p:cTn id="9" fill="hold">
                       <p:stCondLst>
                         <p:cond delay="indefinite"/>
                       </p:stCondLst>
                       <p:childTnLst>
                         <p:par>
-                          <p:cTn id="14" fill="hold">
+                          <p:cTn id="10" fill="hold">
                             <p:stCondLst>
                               <p:cond delay="0"/>
                             </p:stCondLst>
                             <p:childTnLst>
                               <p:par>
-                                <p:cTn id="9" presetID="42" presetClass="entr" presetSubtype="0" fill="hold" grpId="0" nodeType="clickEffect">
+                                <p:cTn id="11" presetID="42" presetClass="entr" presetSubtype="0" fill="hold" nodeType="clickEffect">
                                   <p:stCondLst>
                                     <p:cond delay="0"/>
                                   </p:stCondLst>
                                   <p:childTnLst>
                                     <p:set>
                                       <p:cBhvr>
-                                        <p:cTn id="10" dur="1" fill="hold">
+                                        <p:cTn id="12" dur="1" fill="hold">
                                           <p:stCondLst>
                                             <p:cond delay="0"/>
                                           </p:stCondLst>
@@ -4961,7 +4982,7 @@
                                     </p:set>
                                     <p:animEffect transition="in" filter="fade">
                                       <p:cBhvr>
-                                        <p:cTn id="11" dur="1000"/>
+                                        <p:cTn id="13" dur="1000"/>
                                         <p:tgtEl>
                                           <p:spTgt spid="5"/>
                                         </p:tgtEl>
@@ -4969,7 +4990,7 @@
                                     </p:animEffect>
                                     <p:anim calcmode="lin" valueType="num">
                                       <p:cBhvr>
-                                        <p:cTn id="12" dur="1000" fill="hold"/>
+                                        <p:cTn id="14" dur="1000" fill="hold"/>
                                         <p:tgtEl>
                                           <p:spTgt spid="5"/>
                                         </p:tgtEl>
@@ -5000,26 +5021,26 @@
                     </p:cTn>
                   </p:par>
                   <p:par>
-                    <p:cTn id="19" fill="hold">
+                    <p:cTn id="15" fill="hold">
                       <p:stCondLst>
                         <p:cond delay="indefinite"/>
                       </p:stCondLst>
                       <p:childTnLst>
                         <p:par>
-                          <p:cTn id="20" fill="hold">
+                          <p:cTn id="16" fill="hold">
                             <p:stCondLst>
                               <p:cond delay="0"/>
                             </p:stCondLst>
                             <p:childTnLst>
                               <p:par>
-                                <p:cTn id="15" presetID="42" presetClass="entr" presetSubtype="0" fill="hold" grpId="0" nodeType="clickEffect">
+                                <p:cTn id="17" presetID="42" presetClass="entr" presetSubtype="0" fill="hold" nodeType="clickEffect">
                                   <p:stCondLst>
                                     <p:cond delay="0"/>
                                   </p:stCondLst>
                                   <p:childTnLst>
                                     <p:set>
                                       <p:cBhvr>
-                                        <p:cTn id="16" dur="1" fill="hold">
+                                        <p:cTn id="18" dur="1" fill="hold">
                                           <p:stCondLst>
                                             <p:cond delay="0"/>
                                           </p:stCondLst>
@@ -5037,7 +5058,7 @@
                                     </p:set>
                                     <p:animEffect transition="in" filter="fade">
                                       <p:cBhvr>
-                                        <p:cTn id="17" dur="1000"/>
+                                        <p:cTn id="19" dur="1000"/>
                                         <p:tgtEl>
                                           <p:spTgt spid="6"/>
                                         </p:tgtEl>
@@ -5045,7 +5066,7 @@
                                     </p:animEffect>
                                     <p:anim calcmode="lin" valueType="num">
                                       <p:cBhvr>
-                                        <p:cTn id="18" dur="1000" fill="hold"/>
+                                        <p:cTn id="20" dur="1000" fill="hold"/>
                                         <p:tgtEl>
                                           <p:spTgt spid="6"/>
                                         </p:tgtEl>
@@ -5138,7 +5159,7 @@
           <a:bodyPr wrap="square" lIns="0" tIns="0" rIns="0" bIns="0" rtlCol="0" anchor="t"/>
           <a:lstStyle/>
           <a:p>
-            <a:pPr algn="l" indent="0" marL="0">
+            <a:pPr marL="0" indent="0" algn="l">
               <a:buNone/>
             </a:pPr>
             <a:r>
@@ -5177,7 +5198,7 @@
           <a:bodyPr wrap="square" lIns="0" tIns="0" rIns="0" bIns="0" rtlCol="0" anchor="t"/>
           <a:lstStyle/>
           <a:p>
-            <a:pPr algn="l" indent="0" marL="0">
+            <a:pPr marL="0" indent="0" algn="l">
               <a:buNone/>
             </a:pPr>
             <a:r>
@@ -5189,7 +5210,29 @@
                 <a:ea typeface="Arial" pitchFamily="34" charset="-122"/>
                 <a:cs typeface="Arial" pitchFamily="34" charset="-120"/>
               </a:rPr>
-              <a:t>For next week — and a unit turns</a:t>
+              <a:t>For next week </a:t>
+            </a:r>
+            <a:r>
+              <a:rPr lang="en-US" sz="1300" b="1">
+                <a:solidFill>
+                  <a:srgbClr val="4F81BD"/>
+                </a:solidFill>
+                <a:latin typeface="Arial" pitchFamily="34" charset="0"/>
+                <a:ea typeface="Arial" pitchFamily="34" charset="-122"/>
+                <a:cs typeface="Arial" pitchFamily="34" charset="-120"/>
+              </a:rPr>
+              <a:t>→</a:t>
+            </a:r>
+            <a:r>
+              <a:rPr lang="en-US" sz="1300" b="1" dirty="0">
+                <a:solidFill>
+                  <a:srgbClr val="4F81BD"/>
+                </a:solidFill>
+                <a:latin typeface="Arial" pitchFamily="34" charset="0"/>
+                <a:ea typeface="Arial" pitchFamily="34" charset="-122"/>
+                <a:cs typeface="Arial" pitchFamily="34" charset="-120"/>
+              </a:rPr>
+              <a:t> and a unit turns</a:t>
             </a:r>
             <a:endParaRPr lang="en-US" sz="1600" dirty="0"/>
           </a:p>
@@ -5216,7 +5259,7 @@
           <a:bodyPr wrap="square" lIns="0" tIns="0" rIns="0" bIns="0" rtlCol="0" anchor="t"/>
           <a:lstStyle/>
           <a:p>
-            <a:pPr algn="l" indent="0" marL="0">
+            <a:pPr marL="0" indent="0" algn="l">
               <a:buNone/>
             </a:pPr>
             <a:r>
@@ -5231,9 +5274,6 @@
               <a:t>For next week, read:
 </a:t>
             </a:r>
-            <a:pPr algn="l" indent="0" marL="0">
-              <a:buNone/>
-            </a:pPr>
             <a:r>
               <a:rPr lang="en-US" sz="1500" dirty="0">
                 <a:solidFill>
@@ -5243,12 +5283,19 @@
                 <a:ea typeface="Arial" pitchFamily="34" charset="-122"/>
                 <a:cs typeface="Arial" pitchFamily="34" charset="-120"/>
               </a:rPr>
-              <a:t>•  1 Corinthians 14:26–40  — Paul orders public worship. What governs who may do what — and what does v.37 claim?
-</a:t>
-            </a:r>
-            <a:pPr algn="l" indent="0" marL="0">
-              <a:buNone/>
-            </a:pPr>
+              <a:t>•  1 Corinthians 14:26–40  </a:t>
+            </a:r>
+            <a:r>
+              <a:rPr lang="en-US" sz="1500">
+                <a:solidFill>
+                  <a:srgbClr val="000000"/>
+                </a:solidFill>
+                <a:latin typeface="Arial" pitchFamily="34" charset="0"/>
+                <a:ea typeface="Arial" pitchFamily="34" charset="-122"/>
+                <a:cs typeface="Arial" pitchFamily="34" charset="-120"/>
+              </a:rPr>
+              <a:t>→ </a:t>
+            </a:r>
             <a:r>
               <a:rPr lang="en-US" sz="1500" dirty="0">
                 <a:solidFill>
@@ -5258,7 +5305,52 @@
                 <a:ea typeface="Arial" pitchFamily="34" charset="-122"/>
                 <a:cs typeface="Arial" pitchFamily="34" charset="-120"/>
               </a:rPr>
-              <a:t>•  Jude 3  — “the faith once for all entrusted to the saints.” What does “entrusted” imply about where authority comes from?</a:t>
+              <a:t>Paul orders public worship. What governs who may do what </a:t>
+            </a:r>
+            <a:r>
+              <a:rPr lang="en-US" sz="1500">
+                <a:solidFill>
+                  <a:srgbClr val="000000"/>
+                </a:solidFill>
+                <a:latin typeface="Arial" pitchFamily="34" charset="0"/>
+                <a:ea typeface="Arial" pitchFamily="34" charset="-122"/>
+                <a:cs typeface="Arial" pitchFamily="34" charset="-120"/>
+              </a:rPr>
+              <a:t>→ </a:t>
+            </a:r>
+            <a:r>
+              <a:rPr lang="en-US" sz="1500" dirty="0">
+                <a:solidFill>
+                  <a:srgbClr val="000000"/>
+                </a:solidFill>
+                <a:latin typeface="Arial" pitchFamily="34" charset="0"/>
+                <a:ea typeface="Arial" pitchFamily="34" charset="-122"/>
+                <a:cs typeface="Arial" pitchFamily="34" charset="-120"/>
+              </a:rPr>
+              <a:t>and what does v.37 claim?
+•  Jude 3  </a:t>
+            </a:r>
+            <a:r>
+              <a:rPr lang="en-US" sz="1500">
+                <a:solidFill>
+                  <a:srgbClr val="000000"/>
+                </a:solidFill>
+                <a:latin typeface="Arial" pitchFamily="34" charset="0"/>
+                <a:ea typeface="Arial" pitchFamily="34" charset="-122"/>
+                <a:cs typeface="Arial" pitchFamily="34" charset="-120"/>
+              </a:rPr>
+              <a:t>→</a:t>
+            </a:r>
+            <a:r>
+              <a:rPr lang="en-US" sz="1500" dirty="0">
+                <a:solidFill>
+                  <a:srgbClr val="000000"/>
+                </a:solidFill>
+                <a:latin typeface="Arial" pitchFamily="34" charset="0"/>
+                <a:ea typeface="Arial" pitchFamily="34" charset="-122"/>
+                <a:cs typeface="Arial" pitchFamily="34" charset="-120"/>
+              </a:rPr>
+              <a:t> “the faith once for all entrusted to the saints.” What does “entrusted” imply about where authority comes from?</a:t>
             </a:r>
             <a:endParaRPr lang="en-US" sz="1600" dirty="0"/>
           </a:p>
@@ -5285,7 +5377,7 @@
           <a:bodyPr wrap="square" lIns="0" tIns="0" rIns="0" bIns="0" rtlCol="0" anchor="t"/>
           <a:lstStyle/>
           <a:p>
-            <a:pPr algn="l" indent="0" marL="0">
+            <a:pPr marL="0" indent="0" algn="l">
               <a:buNone/>
             </a:pPr>
             <a:r>
@@ -5297,11 +5389,30 @@
                 <a:ea typeface="Arial" pitchFamily="34" charset="-122"/>
                 <a:cs typeface="Arial" pitchFamily="34" charset="-120"/>
               </a:rPr>
-              <a:t>Next week begins Unit IV — God’s House: </a:t>
-            </a:r>
-            <a:pPr algn="l" indent="0" marL="0">
-              <a:buNone/>
-            </a:pPr>
+              <a:t>Next week begins Unit IV </a:t>
+            </a:r>
+            <a:r>
+              <a:rPr lang="en-US" sz="1600" b="1">
+                <a:solidFill>
+                  <a:srgbClr val="000000"/>
+                </a:solidFill>
+                <a:latin typeface="Arial" pitchFamily="34" charset="0"/>
+                <a:ea typeface="Arial" pitchFamily="34" charset="-122"/>
+                <a:cs typeface="Arial" pitchFamily="34" charset="-120"/>
+              </a:rPr>
+              <a:t>→ </a:t>
+            </a:r>
+            <a:r>
+              <a:rPr lang="en-US" sz="1600" b="1" dirty="0">
+                <a:solidFill>
+                  <a:srgbClr val="000000"/>
+                </a:solidFill>
+                <a:latin typeface="Arial" pitchFamily="34" charset="0"/>
+                <a:ea typeface="Arial" pitchFamily="34" charset="-122"/>
+                <a:cs typeface="Arial" pitchFamily="34" charset="-120"/>
+              </a:rPr>
+              <a:t>God’s House: </a:t>
+            </a:r>
             <a:r>
               <a:rPr lang="en-US" sz="1550" i="1" dirty="0">
                 <a:solidFill>
@@ -5311,7 +5422,29 @@
                 <a:ea typeface="Arial" pitchFamily="34" charset="-122"/>
                 <a:cs typeface="Arial" pitchFamily="34" charset="-120"/>
               </a:rPr>
-              <a:t>Apostolic Appointment — where does teaching authority in the church come from? Two weeks of careful, contested ground.</a:t>
+              <a:t>Apostolic Appointment </a:t>
+            </a:r>
+            <a:r>
+              <a:rPr lang="en-US" sz="1550" i="1">
+                <a:solidFill>
+                  <a:srgbClr val="000000"/>
+                </a:solidFill>
+                <a:latin typeface="Arial" pitchFamily="34" charset="0"/>
+                <a:ea typeface="Arial" pitchFamily="34" charset="-122"/>
+                <a:cs typeface="Arial" pitchFamily="34" charset="-120"/>
+              </a:rPr>
+              <a:t>→</a:t>
+            </a:r>
+            <a:r>
+              <a:rPr lang="en-US" sz="1550" i="1" dirty="0">
+                <a:solidFill>
+                  <a:srgbClr val="000000"/>
+                </a:solidFill>
+                <a:latin typeface="Arial" pitchFamily="34" charset="0"/>
+                <a:ea typeface="Arial" pitchFamily="34" charset="-122"/>
+                <a:cs typeface="Arial" pitchFamily="34" charset="-120"/>
+              </a:rPr>
+              <a:t> where does teaching authority in the church come from? Two weeks of careful, contested ground.</a:t>
             </a:r>
             <a:endParaRPr lang="en-US" sz="1600" dirty="0"/>
           </a:p>
@@ -5338,7 +5471,7 @@
           <a:bodyPr wrap="square" lIns="0" tIns="0" rIns="0" bIns="0" rtlCol="0" anchor="t"/>
           <a:lstStyle/>
           <a:p>
-            <a:pPr algn="l" indent="0" marL="0">
+            <a:pPr marL="0" indent="0" algn="l">
               <a:buNone/>
             </a:pPr>
             <a:r>
@@ -5353,9 +5486,6 @@
               <a:t>Carry this week in one sentence:
 </a:t>
             </a:r>
-            <a:pPr algn="l" indent="0" marL="0">
-              <a:buNone/>
-            </a:pPr>
             <a:r>
               <a:rPr lang="en-US" sz="1600" b="1" i="1" dirty="0">
                 <a:solidFill>
@@ -5365,7 +5495,29 @@
                 <a:ea typeface="Arial" pitchFamily="34" charset="-122"/>
                 <a:cs typeface="Arial" pitchFamily="34" charset="-120"/>
               </a:rPr>
-              <a:t>Sacrifice didn’t end — it changed material. You are the priest, and you are the offering, alive.</a:t>
+              <a:t>Sacrifice didn’t end </a:t>
+            </a:r>
+            <a:r>
+              <a:rPr lang="en-US" sz="1600" b="1" i="1">
+                <a:solidFill>
+                  <a:srgbClr val="1F497D"/>
+                </a:solidFill>
+                <a:latin typeface="Arial" pitchFamily="34" charset="0"/>
+                <a:ea typeface="Arial" pitchFamily="34" charset="-122"/>
+                <a:cs typeface="Arial" pitchFamily="34" charset="-120"/>
+              </a:rPr>
+              <a:t>→</a:t>
+            </a:r>
+            <a:r>
+              <a:rPr lang="en-US" sz="1600" b="1" i="1" dirty="0">
+                <a:solidFill>
+                  <a:srgbClr val="1F497D"/>
+                </a:solidFill>
+                <a:latin typeface="Arial" pitchFamily="34" charset="0"/>
+                <a:ea typeface="Arial" pitchFamily="34" charset="-122"/>
+                <a:cs typeface="Arial" pitchFamily="34" charset="-120"/>
+              </a:rPr>
+              <a:t> it changed material. You are the priest, and you are the offering, alive.</a:t>
             </a:r>
             <a:endParaRPr lang="en-US" sz="1600" dirty="0"/>
           </a:p>
@@ -5392,7 +5544,7 @@
           <a:bodyPr wrap="square" lIns="0" tIns="0" rIns="0" bIns="0" rtlCol="0" anchor="t"/>
           <a:lstStyle/>
           <a:p>
-            <a:pPr algn="ctr" indent="0" marL="0">
+            <a:pPr marL="0" indent="0" algn="ctr">
               <a:buNone/>
             </a:pPr>
             <a:r>
@@ -5431,7 +5583,7 @@
           <a:bodyPr wrap="square" lIns="0" tIns="0" rIns="0" bIns="0" rtlCol="0" anchor="t"/>
           <a:lstStyle/>
           <a:p>
-            <a:pPr algn="ctr" indent="0" marL="0">
+            <a:pPr marL="0" indent="0" algn="ctr">
               <a:buNone/>
             </a:pPr>
             <a:r>
@@ -5442,7 +5594,7 @@
                 <a:latin typeface="Arial" pitchFamily="34" charset="0"/>
                 <a:ea typeface="Arial" pitchFamily="34" charset="-122"/>
                 <a:cs typeface="Arial" pitchFamily="34" charset="-120"/>
-                <a:hlinkClick r:id="rId1" invalidUrl="" action="" tgtFrame="" tooltip="" history="1" highlightClick="0" endSnd="0">
+                <a:hlinkClick r:id="rId3">
                   <a:extLst>
                     <a:ext uri="{A12FA001-AC4F-418D-AE19-62706E023703}">
                       <ahyp:hlinkClr xmlns:ahyp="http://schemas.microsoft.com/office/drawing/2018/hyperlinkcolor" val="tx"/>
@@ -5470,26 +5622,26 @@
               <p:cTn id="2" dur="indefinite" nodeType="mainSeq">
                 <p:childTnLst>
                   <p:par>
-                    <p:cTn id="7" fill="hold">
+                    <p:cTn id="3" fill="hold">
                       <p:stCondLst>
                         <p:cond delay="indefinite"/>
                       </p:stCondLst>
                       <p:childTnLst>
                         <p:par>
-                          <p:cTn id="8" fill="hold">
+                          <p:cTn id="4" fill="hold">
                             <p:stCondLst>
                               <p:cond delay="0"/>
                             </p:stCondLst>
                             <p:childTnLst>
                               <p:par>
-                                <p:cTn id="3" presetID="42" presetClass="entr" presetSubtype="0" fill="hold" grpId="0" nodeType="clickEffect">
+                                <p:cTn id="5" presetID="42" presetClass="entr" presetSubtype="0" fill="hold" nodeType="clickEffect">
                                   <p:stCondLst>
                                     <p:cond delay="0"/>
                                   </p:stCondLst>
                                   <p:childTnLst>
                                     <p:set>
                                       <p:cBhvr>
-                                        <p:cTn id="4" dur="1" fill="hold">
+                                        <p:cTn id="6" dur="1" fill="hold">
                                           <p:stCondLst>
                                             <p:cond delay="0"/>
                                           </p:stCondLst>
@@ -5507,7 +5659,7 @@
                                     </p:set>
                                     <p:animEffect transition="in" filter="fade">
                                       <p:cBhvr>
-                                        <p:cTn id="5" dur="1000"/>
+                                        <p:cTn id="7" dur="1000"/>
                                         <p:tgtEl>
                                           <p:spTgt spid="4"/>
                                         </p:tgtEl>
@@ -5515,7 +5667,7 @@
                                     </p:animEffect>
                                     <p:anim calcmode="lin" valueType="num">
                                       <p:cBhvr>
-                                        <p:cTn id="6" dur="1000" fill="hold"/>
+                                        <p:cTn id="8" dur="1000" fill="hold"/>
                                         <p:tgtEl>
                                           <p:spTgt spid="4"/>
                                         </p:tgtEl>
@@ -5546,26 +5698,26 @@
                     </p:cTn>
                   </p:par>
                   <p:par>
-                    <p:cTn id="13" fill="hold">
+                    <p:cTn id="9" fill="hold">
                       <p:stCondLst>
                         <p:cond delay="indefinite"/>
                       </p:stCondLst>
                       <p:childTnLst>
                         <p:par>
-                          <p:cTn id="14" fill="hold">
+                          <p:cTn id="10" fill="hold">
                             <p:stCondLst>
                               <p:cond delay="0"/>
                             </p:stCondLst>
                             <p:childTnLst>
                               <p:par>
-                                <p:cTn id="9" presetID="42" presetClass="entr" presetSubtype="0" fill="hold" grpId="0" nodeType="clickEffect">
+                                <p:cTn id="11" presetID="42" presetClass="entr" presetSubtype="0" fill="hold" nodeType="clickEffect">
                                   <p:stCondLst>
                                     <p:cond delay="0"/>
                                   </p:stCondLst>
                                   <p:childTnLst>
                                     <p:set>
                                       <p:cBhvr>
-                                        <p:cTn id="10" dur="1" fill="hold">
+                                        <p:cTn id="12" dur="1" fill="hold">
                                           <p:stCondLst>
                                             <p:cond delay="0"/>
                                           </p:stCondLst>
@@ -5583,7 +5735,7 @@
                                     </p:set>
                                     <p:animEffect transition="in" filter="fade">
                                       <p:cBhvr>
-                                        <p:cTn id="11" dur="1000"/>
+                                        <p:cTn id="13" dur="1000"/>
                                         <p:tgtEl>
                                           <p:spTgt spid="5"/>
                                         </p:tgtEl>
@@ -5591,7 +5743,7 @@
                                     </p:animEffect>
                                     <p:anim calcmode="lin" valueType="num">
                                       <p:cBhvr>
-                                        <p:cTn id="12" dur="1000" fill="hold"/>
+                                        <p:cTn id="14" dur="1000" fill="hold"/>
                                         <p:tgtEl>
                                           <p:spTgt spid="5"/>
                                         </p:tgtEl>
@@ -5622,26 +5774,26 @@
                     </p:cTn>
                   </p:par>
                   <p:par>
-                    <p:cTn id="19" fill="hold">
+                    <p:cTn id="15" fill="hold">
                       <p:stCondLst>
                         <p:cond delay="indefinite"/>
                       </p:stCondLst>
                       <p:childTnLst>
                         <p:par>
-                          <p:cTn id="20" fill="hold">
+                          <p:cTn id="16" fill="hold">
                             <p:stCondLst>
                               <p:cond delay="0"/>
                             </p:stCondLst>
                             <p:childTnLst>
                               <p:par>
-                                <p:cTn id="15" presetID="42" presetClass="entr" presetSubtype="0" fill="hold" grpId="0" nodeType="clickEffect">
+                                <p:cTn id="17" presetID="42" presetClass="entr" presetSubtype="0" fill="hold" nodeType="clickEffect">
                                   <p:stCondLst>
                                     <p:cond delay="0"/>
                                   </p:stCondLst>
                                   <p:childTnLst>
                                     <p:set>
                                       <p:cBhvr>
-                                        <p:cTn id="16" dur="1" fill="hold">
+                                        <p:cTn id="18" dur="1" fill="hold">
                                           <p:stCondLst>
                                             <p:cond delay="0"/>
                                           </p:stCondLst>
@@ -5659,7 +5811,7 @@
                                     </p:set>
                                     <p:animEffect transition="in" filter="fade">
                                       <p:cBhvr>
-                                        <p:cTn id="17" dur="1000"/>
+                                        <p:cTn id="19" dur="1000"/>
                                         <p:tgtEl>
                                           <p:spTgt spid="6"/>
                                         </p:tgtEl>
@@ -5667,7 +5819,7 @@
                                     </p:animEffect>
                                     <p:anim calcmode="lin" valueType="num">
                                       <p:cBhvr>
-                                        <p:cTn id="18" dur="1000" fill="hold"/>
+                                        <p:cTn id="20" dur="1000" fill="hold"/>
                                         <p:tgtEl>
                                           <p:spTgt spid="6"/>
                                         </p:tgtEl>
@@ -5698,26 +5850,26 @@
                     </p:cTn>
                   </p:par>
                   <p:par>
-                    <p:cTn id="25" fill="hold">
+                    <p:cTn id="21" fill="hold">
                       <p:stCondLst>
                         <p:cond delay="indefinite"/>
                       </p:stCondLst>
                       <p:childTnLst>
                         <p:par>
-                          <p:cTn id="26" fill="hold">
+                          <p:cTn id="22" fill="hold">
                             <p:stCondLst>
                               <p:cond delay="0"/>
                             </p:stCondLst>
                             <p:childTnLst>
                               <p:par>
-                                <p:cTn id="21" presetID="42" presetClass="entr" presetSubtype="0" fill="hold" grpId="0" nodeType="clickEffect">
+                                <p:cTn id="23" presetID="42" presetClass="entr" presetSubtype="0" fill="hold" nodeType="clickEffect">
                                   <p:stCondLst>
                                     <p:cond delay="0"/>
                                   </p:stCondLst>
                                   <p:childTnLst>
                                     <p:set>
                                       <p:cBhvr>
-                                        <p:cTn id="22" dur="1" fill="hold">
+                                        <p:cTn id="24" dur="1" fill="hold">
                                           <p:stCondLst>
                                             <p:cond delay="0"/>
                                           </p:stCondLst>
@@ -5735,7 +5887,7 @@
                                     </p:set>
                                     <p:animEffect transition="in" filter="fade">
                                       <p:cBhvr>
-                                        <p:cTn id="23" dur="1000"/>
+                                        <p:cTn id="25" dur="1000"/>
                                         <p:tgtEl>
                                           <p:spTgt spid="7"/>
                                         </p:tgtEl>
@@ -5743,7 +5895,7 @@
                                     </p:animEffect>
                                     <p:anim calcmode="lin" valueType="num">
                                       <p:cBhvr>
-                                        <p:cTn id="24" dur="1000" fill="hold"/>
+                                        <p:cTn id="26" dur="1000" fill="hold"/>
                                         <p:tgtEl>
                                           <p:spTgt spid="7"/>
                                         </p:tgtEl>
@@ -6091,4 +6243,319 @@
     </a:ext>
   </a:extLst>
 </a:theme>
+</file>
+
+<file path=ppt/theme/theme2.xml><?xml version="1.0" encoding="utf-8"?>
+<a:theme xmlns:a="http://schemas.openxmlformats.org/drawingml/2006/main" name="Office Theme">
+  <a:themeElements>
+    <a:clrScheme name="Office">
+      <a:dk1>
+        <a:sysClr val="windowText" lastClr="000000"/>
+      </a:dk1>
+      <a:lt1>
+        <a:sysClr val="window" lastClr="FFFFFF"/>
+      </a:lt1>
+      <a:dk2>
+        <a:srgbClr val="0E2841"/>
+      </a:dk2>
+      <a:lt2>
+        <a:srgbClr val="E8E8E8"/>
+      </a:lt2>
+      <a:accent1>
+        <a:srgbClr val="156082"/>
+      </a:accent1>
+      <a:accent2>
+        <a:srgbClr val="E97132"/>
+      </a:accent2>
+      <a:accent3>
+        <a:srgbClr val="196B24"/>
+      </a:accent3>
+      <a:accent4>
+        <a:srgbClr val="0F9ED5"/>
+      </a:accent4>
+      <a:accent5>
+        <a:srgbClr val="A02B93"/>
+      </a:accent5>
+      <a:accent6>
+        <a:srgbClr val="4EA72E"/>
+      </a:accent6>
+      <a:hlink>
+        <a:srgbClr val="467886"/>
+      </a:hlink>
+      <a:folHlink>
+        <a:srgbClr val="96607D"/>
+      </a:folHlink>
+    </a:clrScheme>
+    <a:fontScheme name="Office">
+      <a:majorFont>
+        <a:latin typeface="Aptos Display" panose="02110004020202020204"/>
+        <a:ea typeface=""/>
+        <a:cs typeface=""/>
+        <a:font script="Jpan" typeface="游ゴシック Light"/>
+        <a:font script="Hang" typeface="맑은 고딕"/>
+        <a:font script="Hans" typeface="等线 Light"/>
+        <a:font script="Hant" typeface="新細明體"/>
+        <a:font script="Arab" typeface="Times New Roman"/>
+        <a:font script="Hebr" typeface="Times New Roman"/>
+        <a:font script="Thai" typeface="Angsana New"/>
+        <a:font script="Ethi" typeface="Nyala"/>
+        <a:font script="Beng" typeface="Vrinda"/>
+        <a:font script="Gujr" typeface="Shruti"/>
+        <a:font script="Khmr" typeface="MoolBoran"/>
+        <a:font script="Knda" typeface="Tunga"/>
+        <a:font script="Guru" typeface="Raavi"/>
+        <a:font script="Cans" typeface="Euphemia"/>
+        <a:font script="Cher" typeface="Plantagenet Cherokee"/>
+        <a:font script="Yiii" typeface="Microsoft Yi Baiti"/>
+        <a:font script="Tibt" typeface="Microsoft Himalaya"/>
+        <a:font script="Thaa" typeface="MV Boli"/>
+        <a:font script="Deva" typeface="Mangal"/>
+        <a:font script="Telu" typeface="Gautami"/>
+        <a:font script="Taml" typeface="Latha"/>
+        <a:font script="Syrc" typeface="Estrangelo Edessa"/>
+        <a:font script="Orya" typeface="Kalinga"/>
+        <a:font script="Mlym" typeface="Kartika"/>
+        <a:font script="Laoo" typeface="DokChampa"/>
+        <a:font script="Sinh" typeface="Iskoola Pota"/>
+        <a:font script="Mong" typeface="Mongolian Baiti"/>
+        <a:font script="Viet" typeface="Times New Roman"/>
+        <a:font script="Uigh" typeface="Microsoft Uighur"/>
+        <a:font script="Geor" typeface="Sylfaen"/>
+        <a:font script="Armn" typeface="Arial"/>
+        <a:font script="Bugi" typeface="Leelawadee UI"/>
+        <a:font script="Bopo" typeface="Microsoft JhengHei"/>
+        <a:font script="Java" typeface="Javanese Text"/>
+        <a:font script="Lisu" typeface="Segoe UI"/>
+        <a:font script="Mymr" typeface="Myanmar Text"/>
+        <a:font script="Nkoo" typeface="Ebrima"/>
+        <a:font script="Olck" typeface="Nirmala UI"/>
+        <a:font script="Osma" typeface="Ebrima"/>
+        <a:font script="Phag" typeface="Phagspa"/>
+        <a:font script="Syrn" typeface="Estrangelo Edessa"/>
+        <a:font script="Syrj" typeface="Estrangelo Edessa"/>
+        <a:font script="Syre" typeface="Estrangelo Edessa"/>
+        <a:font script="Sora" typeface="Nirmala UI"/>
+        <a:font script="Tale" typeface="Microsoft Tai Le"/>
+        <a:font script="Talu" typeface="Microsoft New Tai Lue"/>
+        <a:font script="Tfng" typeface="Ebrima"/>
+      </a:majorFont>
+      <a:minorFont>
+        <a:latin typeface="Aptos" panose="02110004020202020204"/>
+        <a:ea typeface=""/>
+        <a:cs typeface=""/>
+        <a:font script="Jpan" typeface="游ゴシック"/>
+        <a:font script="Hang" typeface="맑은 고딕"/>
+        <a:font script="Hans" typeface="等线"/>
+        <a:font script="Hant" typeface="新細明體"/>
+        <a:font script="Arab" typeface="Arial"/>
+        <a:font script="Hebr" typeface="Arial"/>
+        <a:font script="Thai" typeface="Cordia New"/>
+        <a:font script="Ethi" typeface="Nyala"/>
+        <a:font script="Beng" typeface="Vrinda"/>
+        <a:font script="Gujr" typeface="Shruti"/>
+        <a:font script="Khmr" typeface="DaunPenh"/>
+        <a:font script="Knda" typeface="Tunga"/>
+        <a:font script="Guru" typeface="Raavi"/>
+        <a:font script="Cans" typeface="Euphemia"/>
+        <a:font script="Cher" typeface="Plantagenet Cherokee"/>
+        <a:font script="Yiii" typeface="Microsoft Yi Baiti"/>
+        <a:font script="Tibt" typeface="Microsoft Himalaya"/>
+        <a:font script="Thaa" typeface="MV Boli"/>
+        <a:font script="Deva" typeface="Mangal"/>
+        <a:font script="Telu" typeface="Gautami"/>
+        <a:font script="Taml" typeface="Latha"/>
+        <a:font script="Syrc" typeface="Estrangelo Edessa"/>
+        <a:font script="Orya" typeface="Kalinga"/>
+        <a:font script="Mlym" typeface="Kartika"/>
+        <a:font script="Laoo" typeface="DokChampa"/>
+        <a:font script="Sinh" typeface="Iskoola Pota"/>
+        <a:font script="Mong" typeface="Mongolian Baiti"/>
+        <a:font script="Viet" typeface="Arial"/>
+        <a:font script="Uigh" typeface="Microsoft Uighur"/>
+        <a:font script="Geor" typeface="Sylfaen"/>
+        <a:font script="Armn" typeface="Arial"/>
+        <a:font script="Bugi" typeface="Leelawadee UI"/>
+        <a:font script="Bopo" typeface="Microsoft JhengHei"/>
+        <a:font script="Java" typeface="Javanese Text"/>
+        <a:font script="Lisu" typeface="Segoe UI"/>
+        <a:font script="Mymr" typeface="Myanmar Text"/>
+        <a:font script="Nkoo" typeface="Ebrima"/>
+        <a:font script="Olck" typeface="Nirmala UI"/>
+        <a:font script="Osma" typeface="Ebrima"/>
+        <a:font script="Phag" typeface="Phagspa"/>
+        <a:font script="Syrn" typeface="Estrangelo Edessa"/>
+        <a:font script="Syrj" typeface="Estrangelo Edessa"/>
+        <a:font script="Syre" typeface="Estrangelo Edessa"/>
+        <a:font script="Sora" typeface="Nirmala UI"/>
+        <a:font script="Tale" typeface="Microsoft Tai Le"/>
+        <a:font script="Talu" typeface="Microsoft New Tai Lue"/>
+        <a:font script="Tfng" typeface="Ebrima"/>
+      </a:minorFont>
+    </a:fontScheme>
+    <a:fmtScheme name="Office">
+      <a:fillStyleLst>
+        <a:solidFill>
+          <a:schemeClr val="phClr"/>
+        </a:solidFill>
+        <a:gradFill rotWithShape="1">
+          <a:gsLst>
+            <a:gs pos="0">
+              <a:schemeClr val="phClr">
+                <a:lumMod val="110000"/>
+                <a:satMod val="105000"/>
+                <a:tint val="67000"/>
+              </a:schemeClr>
+            </a:gs>
+            <a:gs pos="50000">
+              <a:schemeClr val="phClr">
+                <a:lumMod val="105000"/>
+                <a:satMod val="103000"/>
+                <a:tint val="73000"/>
+              </a:schemeClr>
+            </a:gs>
+            <a:gs pos="100000">
+              <a:schemeClr val="phClr">
+                <a:lumMod val="105000"/>
+                <a:satMod val="109000"/>
+                <a:tint val="81000"/>
+              </a:schemeClr>
+            </a:gs>
+          </a:gsLst>
+          <a:lin ang="5400000" scaled="0"/>
+        </a:gradFill>
+        <a:gradFill rotWithShape="1">
+          <a:gsLst>
+            <a:gs pos="0">
+              <a:schemeClr val="phClr">
+                <a:satMod val="103000"/>
+                <a:lumMod val="102000"/>
+                <a:tint val="94000"/>
+              </a:schemeClr>
+            </a:gs>
+            <a:gs pos="50000">
+              <a:schemeClr val="phClr">
+                <a:satMod val="110000"/>
+                <a:lumMod val="100000"/>
+                <a:shade val="100000"/>
+              </a:schemeClr>
+            </a:gs>
+            <a:gs pos="100000">
+              <a:schemeClr val="phClr">
+                <a:lumMod val="99000"/>
+                <a:satMod val="120000"/>
+                <a:shade val="78000"/>
+              </a:schemeClr>
+            </a:gs>
+          </a:gsLst>
+          <a:lin ang="5400000" scaled="0"/>
+        </a:gradFill>
+      </a:fillStyleLst>
+      <a:lnStyleLst>
+        <a:ln w="12700" cap="flat" cmpd="sng" algn="ctr">
+          <a:solidFill>
+            <a:schemeClr val="phClr"/>
+          </a:solidFill>
+          <a:prstDash val="solid"/>
+          <a:miter lim="800000"/>
+        </a:ln>
+        <a:ln w="19050" cap="flat" cmpd="sng" algn="ctr">
+          <a:solidFill>
+            <a:schemeClr val="phClr"/>
+          </a:solidFill>
+          <a:prstDash val="solid"/>
+          <a:miter lim="800000"/>
+        </a:ln>
+        <a:ln w="25400" cap="flat" cmpd="sng" algn="ctr">
+          <a:solidFill>
+            <a:schemeClr val="phClr"/>
+          </a:solidFill>
+          <a:prstDash val="solid"/>
+          <a:miter lim="800000"/>
+        </a:ln>
+      </a:lnStyleLst>
+      <a:effectStyleLst>
+        <a:effectStyle>
+          <a:effectLst/>
+        </a:effectStyle>
+        <a:effectStyle>
+          <a:effectLst/>
+        </a:effectStyle>
+        <a:effectStyle>
+          <a:effectLst>
+            <a:outerShdw blurRad="57150" dist="19050" dir="5400000" algn="ctr" rotWithShape="0">
+              <a:srgbClr val="000000">
+                <a:alpha val="63000"/>
+              </a:srgbClr>
+            </a:outerShdw>
+          </a:effectLst>
+        </a:effectStyle>
+      </a:effectStyleLst>
+      <a:bgFillStyleLst>
+        <a:solidFill>
+          <a:schemeClr val="phClr"/>
+        </a:solidFill>
+        <a:solidFill>
+          <a:schemeClr val="phClr">
+            <a:tint val="95000"/>
+            <a:satMod val="170000"/>
+          </a:schemeClr>
+        </a:solidFill>
+        <a:gradFill rotWithShape="1">
+          <a:gsLst>
+            <a:gs pos="0">
+              <a:schemeClr val="phClr">
+                <a:tint val="93000"/>
+                <a:satMod val="150000"/>
+                <a:shade val="98000"/>
+                <a:lumMod val="102000"/>
+              </a:schemeClr>
+            </a:gs>
+            <a:gs pos="50000">
+              <a:schemeClr val="phClr">
+                <a:tint val="98000"/>
+                <a:satMod val="130000"/>
+                <a:shade val="90000"/>
+                <a:lumMod val="103000"/>
+              </a:schemeClr>
+            </a:gs>
+            <a:gs pos="100000">
+              <a:schemeClr val="phClr">
+                <a:shade val="63000"/>
+                <a:satMod val="120000"/>
+              </a:schemeClr>
+            </a:gs>
+          </a:gsLst>
+          <a:lin ang="5400000" scaled="0"/>
+        </a:gradFill>
+      </a:bgFillStyleLst>
+    </a:fmtScheme>
+  </a:themeElements>
+  <a:objectDefaults>
+    <a:lnDef>
+      <a:spPr/>
+      <a:bodyPr/>
+      <a:lstStyle/>
+      <a:style>
+        <a:lnRef idx="2">
+          <a:schemeClr val="accent1"/>
+        </a:lnRef>
+        <a:fillRef idx="0">
+          <a:schemeClr val="accent1"/>
+        </a:fillRef>
+        <a:effectRef idx="1">
+          <a:schemeClr val="accent1"/>
+        </a:effectRef>
+        <a:fontRef idx="minor">
+          <a:schemeClr val="tx1"/>
+        </a:fontRef>
+      </a:style>
+    </a:lnDef>
+  </a:objectDefaults>
+  <a:extraClrSchemeLst/>
+  <a:extLst>
+    <a:ext uri="{05A4C25C-085E-4340-85A3-A5531E510DB2}">
+      <thm15:themeFamily xmlns:thm15="http://schemas.microsoft.com/office/thememl/2012/main" name="Office Theme" id="{2E142A2C-CD16-42D6-873A-C26D2A0506FA}" vid="{1BDDFF52-6CD6-40A5-AB3C-68EB2F1E4D0A}"/>
+    </a:ext>
+  </a:extLst>
+</a:theme>
 </file>